--- a/output/presentation/techflow-assist-multimodal.pptx
+++ b/output/presentation/techflow-assist-multimodal.pptx
@@ -2,20 +2,21 @@
 <file path=ppt/presentation.xml><?xml version="1.0" encoding="utf-8"?>
 <p:presentation xmlns:p="http://schemas.openxmlformats.org/presentationml/2006/main">
   <p:sldMasterIdLst>
-    <p:sldMasterId xmlns:r="http://schemas.openxmlformats.org/officeDocument/2006/relationships" id="2147483648" r:id="Rf7674525787f4130"/>
+    <p:sldMasterId xmlns:r="http://schemas.openxmlformats.org/officeDocument/2006/relationships" id="2147483648" r:id="Rbef245df35144d30"/>
   </p:sldMasterIdLst>
   <p:notesMasterIdLst>
-    <p:notesMasterId xmlns:r="http://schemas.openxmlformats.org/officeDocument/2006/relationships" r:id="R2731e1cc120a48e5"/>
+    <p:notesMasterId xmlns:r="http://schemas.openxmlformats.org/officeDocument/2006/relationships" r:id="Rd12e22bd567f4772"/>
   </p:notesMasterIdLst>
   <p:sldIdLst>
-    <p:sldId xmlns:r="http://schemas.openxmlformats.org/officeDocument/2006/relationships" id="256" r:id="R5f821feded7445f6"/>
-    <p:sldId xmlns:r="http://schemas.openxmlformats.org/officeDocument/2006/relationships" id="257" r:id="R005aa54cd360407e"/>
-    <p:sldId xmlns:r="http://schemas.openxmlformats.org/officeDocument/2006/relationships" id="258" r:id="R4145c09198fd45eb"/>
-    <p:sldId xmlns:r="http://schemas.openxmlformats.org/officeDocument/2006/relationships" id="259" r:id="R2c0524fb52b34394"/>
-    <p:sldId xmlns:r="http://schemas.openxmlformats.org/officeDocument/2006/relationships" id="260" r:id="R81a1cdd13b0c454b"/>
-    <p:sldId xmlns:r="http://schemas.openxmlformats.org/officeDocument/2006/relationships" id="261" r:id="R7e91beb5893c489c"/>
-    <p:sldId xmlns:r="http://schemas.openxmlformats.org/officeDocument/2006/relationships" id="262" r:id="R719e923db96b4395"/>
-    <p:sldId xmlns:r="http://schemas.openxmlformats.org/officeDocument/2006/relationships" id="263" r:id="Rfae57b6de6c54eba"/>
+    <p:sldId xmlns:r="http://schemas.openxmlformats.org/officeDocument/2006/relationships" id="256" r:id="R8c0e26ac6fba433f"/>
+    <p:sldId xmlns:r="http://schemas.openxmlformats.org/officeDocument/2006/relationships" id="257" r:id="R1af9abf2f8c64f77"/>
+    <p:sldId xmlns:r="http://schemas.openxmlformats.org/officeDocument/2006/relationships" id="258" r:id="R07d077bb31e240a4"/>
+    <p:sldId xmlns:r="http://schemas.openxmlformats.org/officeDocument/2006/relationships" id="259" r:id="Rc50d68fba67d45ee"/>
+    <p:sldId xmlns:r="http://schemas.openxmlformats.org/officeDocument/2006/relationships" id="260" r:id="R812ce2d66f8c496e"/>
+    <p:sldId xmlns:r="http://schemas.openxmlformats.org/officeDocument/2006/relationships" id="261" r:id="R6a487e6bb1044316"/>
+    <p:sldId xmlns:r="http://schemas.openxmlformats.org/officeDocument/2006/relationships" id="262" r:id="Rb5ac4d2ae80248d6"/>
+    <p:sldId xmlns:r="http://schemas.openxmlformats.org/officeDocument/2006/relationships" id="263" r:id="R2117c06b27664e65"/>
+    <p:sldId xmlns:r="http://schemas.openxmlformats.org/officeDocument/2006/relationships" id="264" r:id="R73c28341662f4f7c"/>
   </p:sldIdLst>
   <p:sldSz cx="12192000" cy="6858000"/>
   <p:notesSz cx="6858000" cy="9144000"/>
@@ -754,12 +755,12 @@
           </a:p>
           <a:p xmlns:a="http://schemas.openxmlformats.org/drawingml/2006/main">
             <a:r>
-              <a:t>- Internal: output/issues-56-58-live-evaluation.json</a:t>
-            </a:r>
-          </a:p>
-          <a:p xmlns:a="http://schemas.openxmlformats.org/drawingml/2006/main">
-            <a:r>
-              <a:t>- Internal: services/ai-gateway/openapi/techflow-ai-gateway-v1.json</a:t>
+              <a:t>- Internal synthetic artifact derived from output/issues-56-58-live-evaluation.json</a:t>
+            </a:r>
+          </a:p>
+          <a:p xmlns:a="http://schemas.openxmlformats.org/drawingml/2006/main">
+            <a:r>
+              <a:t>- Internal: docs/reports/issues-56-58-assist-multimodal-validation.md</a:t>
             </a:r>
           </a:p>
         </p:txBody>
@@ -834,12 +835,12 @@
           </a:p>
           <a:p xmlns:a="http://schemas.openxmlformats.org/drawingml/2006/main">
             <a:r>
-              <a:t>- Internal: output/issues-56-58-reference-evaluation.json</a:t>
-            </a:r>
-          </a:p>
-          <a:p xmlns:a="http://schemas.openxmlformats.org/drawingml/2006/main">
-            <a:r>
               <a:t>- Internal: output/issues-56-58-live-evaluation.json</a:t>
+            </a:r>
+          </a:p>
+          <a:p xmlns:a="http://schemas.openxmlformats.org/drawingml/2006/main">
+            <a:r>
+              <a:t>- Internal: services/ai-gateway/openapi/techflow-ai-gateway-v1.json</a:t>
             </a:r>
           </a:p>
         </p:txBody>
@@ -914,7 +915,12 @@
           </a:p>
           <a:p xmlns:a="http://schemas.openxmlformats.org/drawingml/2006/main">
             <a:r>
-              <a:t>- Internal: docs/runbooks/assist-multimodal.md</a:t>
+              <a:t>- Internal: output/issues-56-58-reference-evaluation.json</a:t>
+            </a:r>
+          </a:p>
+          <a:p xmlns:a="http://schemas.openxmlformats.org/drawingml/2006/main">
+            <a:r>
+              <a:t>- Internal: output/issues-56-58-live-evaluation.json</a:t>
             </a:r>
           </a:p>
         </p:txBody>
@@ -945,6 +951,81 @@
 </file>
 
 <file path=ppt/notesSlides/notesSlide8.xml><?xml version="1.0" encoding="utf-8"?>
+<p:notes xmlns:p="http://schemas.openxmlformats.org/presentationml/2006/main">
+  <p:cSld>
+    <p:spTree>
+      <p:nvGrpSpPr>
+        <p:cNvPr id="1" name=""/>
+        <p:cNvGrpSpPr/>
+        <p:nvPr/>
+      </p:nvGrpSpPr>
+      <p:grpSpPr>
+        <a:xfrm xmlns:a="http://schemas.openxmlformats.org/drawingml/2006/main"/>
+      </p:grpSpPr>
+      <p:sp>
+        <p:nvSpPr>
+          <p:cNvPr id="2" name="Slide Image Placeholder 1"/>
+          <p:cNvSpPr>
+            <a:spLocks xmlns:a="http://schemas.openxmlformats.org/drawingml/2006/main" noGrp="1"/>
+          </p:cNvSpPr>
+          <p:nvPr>
+            <p:ph type="sldImg" idx="0"/>
+          </p:nvPr>
+        </p:nvSpPr>
+        <p:spPr/>
+      </p:sp>
+      <p:sp>
+        <p:nvSpPr>
+          <p:cNvPr id="3" name="Notes Placeholder 2"/>
+          <p:cNvSpPr>
+            <a:spLocks xmlns:a="http://schemas.openxmlformats.org/drawingml/2006/main" noGrp="1"/>
+          </p:cNvSpPr>
+          <p:nvPr>
+            <p:ph type="body" idx="1"/>
+          </p:nvPr>
+        </p:nvSpPr>
+        <p:spPr/>
+        <p:txBody>
+          <a:bodyPr xmlns:a="http://schemas.openxmlformats.org/drawingml/2006/main"/>
+          <a:lstStyle xmlns:a="http://schemas.openxmlformats.org/drawingml/2006/main"/>
+          <a:p xmlns:a="http://schemas.openxmlformats.org/drawingml/2006/main">
+            <a:r>
+              <a:t>[Sources]</a:t>
+            </a:r>
+          </a:p>
+          <a:p xmlns:a="http://schemas.openxmlformats.org/drawingml/2006/main">
+            <a:r>
+              <a:t>- Internal: docs/runbooks/assist-multimodal.md</a:t>
+            </a:r>
+          </a:p>
+        </p:txBody>
+      </p:sp>
+      <p:sp>
+        <p:nvSpPr>
+          <p:cNvPr id="4" name="Slide Number Placeholder 3"/>
+          <p:cNvSpPr>
+            <a:spLocks xmlns:a="http://schemas.openxmlformats.org/drawingml/2006/main" noGrp="1"/>
+          </p:cNvSpPr>
+          <p:nvPr>
+            <p:ph type="sldNum" idx="5"/>
+          </p:nvPr>
+        </p:nvSpPr>
+        <p:spPr/>
+        <p:txBody>
+          <a:bodyPr xmlns:a="http://schemas.openxmlformats.org/drawingml/2006/main"/>
+          <a:lstStyle xmlns:a="http://schemas.openxmlformats.org/drawingml/2006/main"/>
+          <a:p xmlns:a="http://schemas.openxmlformats.org/drawingml/2006/main"/>
+        </p:txBody>
+      </p:sp>
+    </p:spTree>
+  </p:cSld>
+  <p:clrMapOvr>
+    <a:masterClrMapping xmlns:a="http://schemas.openxmlformats.org/drawingml/2006/main"/>
+  </p:clrMapOvr>
+</p:notes>
+</file>
+
+<file path=ppt/notesSlides/notesSlide9.xml><?xml version="1.0" encoding="utf-8"?>
 <p:notes xmlns:p="http://schemas.openxmlformats.org/presentationml/2006/main">
   <p:cSld>
     <p:spTree>
@@ -1057,7 +1138,7 @@
   </p:cSld>
   <p:clrMap bg1="lt1" tx1="dk1" bg2="lt2" tx2="dk2" accent1="accent1" accent2="accent2" accent3="accent3" accent4="accent4" accent5="accent5" accent6="accent6" hlink="hlink" folHlink="folHlink"/>
   <p:sldLayoutIdLst>
-    <p:sldLayoutId xmlns:r="http://schemas.openxmlformats.org/officeDocument/2006/relationships" id="2147483649" r:id="Rdbf046b40e5648ed"/>
+    <p:sldLayoutId xmlns:r="http://schemas.openxmlformats.org/officeDocument/2006/relationships" id="2147483649" r:id="Re84657c2175a4966"/>
   </p:sldLayoutIdLst>
   <p:txStyles>
     <p:titleStyle>
@@ -1626,6 +1707,7 @@
           <a:lstStyle xmlns:a="http://schemas.openxmlformats.org/drawingml/2006/main"/>
           <a:p xmlns:a="http://schemas.openxmlformats.org/drawingml/2006/main">
             <a:pPr algn="l">
+              <a:buNone/>
               <a:defRPr sz="6000">
                 <a:solidFill>
                   <a:srgbClr val="000000"/>
@@ -1637,7 +1719,7 @@
             </a:pPr>
             <a:r>
               <a:t>Assist 종합·
-멀티모달 검증</a:t>
+멀티모달·로그 검증</a:t>
             </a:r>
           </a:p>
         </p:txBody>
@@ -1672,6 +1754,7 @@
           <a:lstStyle xmlns:a="http://schemas.openxmlformats.org/drawingml/2006/main"/>
           <a:p xmlns:a="http://schemas.openxmlformats.org/drawingml/2006/main">
             <a:pPr algn="l">
+              <a:buNone/>
               <a:defRPr sz="2400">
                 <a:solidFill>
                   <a:srgbClr val="000000"/>
@@ -1717,6 +1800,7 @@
           <a:lstStyle xmlns:a="http://schemas.openxmlformats.org/drawingml/2006/main"/>
           <a:p xmlns:a="http://schemas.openxmlformats.org/drawingml/2006/main">
             <a:pPr algn="l">
+              <a:buNone/>
               <a:defRPr sz="2400">
                 <a:solidFill>
                   <a:srgbClr val="000000"/>
@@ -1782,6 +1866,7 @@
           <a:lstStyle xmlns:a="http://schemas.openxmlformats.org/drawingml/2006/main"/>
           <a:p xmlns:a="http://schemas.openxmlformats.org/drawingml/2006/main">
             <a:pPr algn="r">
+              <a:buNone/>
               <a:defRPr sz="1000">
                 <a:solidFill>
                   <a:srgbClr val="000000"/>
@@ -1827,6 +1912,7 @@
           <a:lstStyle xmlns:a="http://schemas.openxmlformats.org/drawingml/2006/main"/>
           <a:p xmlns:a="http://schemas.openxmlformats.org/drawingml/2006/main">
             <a:pPr algn="l">
+              <a:buNone/>
               <a:defRPr sz="2900">
                 <a:solidFill>
                   <a:srgbClr val="000000"/>
@@ -1837,14 +1923,14 @@
               </a:defRPr>
             </a:pPr>
             <a:r>
-              <a:t>질문은 세 개의 증거 게이트를 통과한다</a:t>
+              <a:t>질문과 첨부물은 세 개의 증거 게이트를 통과한다</a:t>
             </a:r>
           </a:p>
         </p:txBody>
       </p:sp>
       <p:cxnSp>
         <p:nvCxnSpPr>
-          <p:cNvPr id="15" name="Google-Shape-2259-p159-4"/>
+          <p:cNvPr id="21" name="Google-Shape-2259-p159-4"/>
           <p:cNvCxnSpPr/>
           <p:nvPr/>
         </p:nvCxnSpPr>
@@ -1975,6 +2061,7 @@
           <a:lstStyle xmlns:a="http://schemas.openxmlformats.org/drawingml/2006/main"/>
           <a:p xmlns:a="http://schemas.openxmlformats.org/drawingml/2006/main">
             <a:pPr algn="l">
+              <a:buNone/>
               <a:defRPr sz="1600">
                 <a:solidFill>
                   <a:srgbClr val="000000"/>
@@ -2020,6 +2107,7 @@
           <a:lstStyle xmlns:a="http://schemas.openxmlformats.org/drawingml/2006/main"/>
           <a:p xmlns:a="http://schemas.openxmlformats.org/drawingml/2006/main">
             <a:pPr algn="l">
+              <a:buNone/>
               <a:defRPr sz="1600">
                 <a:solidFill>
                   <a:srgbClr val="000000"/>
@@ -2065,6 +2153,7 @@
           <a:lstStyle xmlns:a="http://schemas.openxmlformats.org/drawingml/2006/main"/>
           <a:p xmlns:a="http://schemas.openxmlformats.org/drawingml/2006/main">
             <a:pPr algn="l">
+              <a:buNone/>
               <a:defRPr sz="1600">
                 <a:solidFill>
                   <a:srgbClr val="000000"/>
@@ -2110,6 +2199,7 @@
           <a:lstStyle xmlns:a="http://schemas.openxmlformats.org/drawingml/2006/main"/>
           <a:p xmlns:a="http://schemas.openxmlformats.org/drawingml/2006/main">
             <a:pPr algn="l">
+              <a:buNone/>
               <a:defRPr sz="2400">
                 <a:solidFill>
                   <a:srgbClr val="000000"/>
@@ -2125,6 +2215,7 @@
           </a:p>
           <a:p xmlns:a="http://schemas.openxmlformats.org/drawingml/2006/main">
             <a:pPr algn="l">
+              <a:buNone/>
               <a:defRPr sz="2400">
                 <a:solidFill>
                   <a:srgbClr val="000000"/>
@@ -2170,6 +2261,7 @@
           <a:lstStyle xmlns:a="http://schemas.openxmlformats.org/drawingml/2006/main"/>
           <a:p xmlns:a="http://schemas.openxmlformats.org/drawingml/2006/main">
             <a:pPr algn="l">
+              <a:buNone/>
               <a:defRPr sz="2400">
                 <a:solidFill>
                   <a:srgbClr val="000000"/>
@@ -2185,6 +2277,7 @@
           </a:p>
           <a:p xmlns:a="http://schemas.openxmlformats.org/drawingml/2006/main">
             <a:pPr algn="l">
+              <a:buNone/>
               <a:defRPr sz="2400">
                 <a:solidFill>
                   <a:srgbClr val="000000"/>
@@ -2230,6 +2323,7 @@
           <a:lstStyle xmlns:a="http://schemas.openxmlformats.org/drawingml/2006/main"/>
           <a:p xmlns:a="http://schemas.openxmlformats.org/drawingml/2006/main">
             <a:pPr algn="l">
+              <a:buNone/>
               <a:defRPr sz="2400">
                 <a:solidFill>
                   <a:srgbClr val="000000"/>
@@ -2245,6 +2339,7 @@
           </a:p>
           <a:p xmlns:a="http://schemas.openxmlformats.org/drawingml/2006/main">
             <a:pPr algn="l">
+              <a:buNone/>
               <a:defRPr sz="2400">
                 <a:solidFill>
                   <a:srgbClr val="000000"/>
@@ -2255,7 +2350,7 @@
               </a:defRPr>
             </a:pPr>
             <a:r>
-              <a:t>관찰·진단·조치·미확인</a:t>
+              <a:t>화면·로그·소스 종합</a:t>
             </a:r>
           </a:p>
         </p:txBody>
@@ -2312,6 +2407,7 @@
           <a:lstStyle xmlns:a="http://schemas.openxmlformats.org/drawingml/2006/main"/>
           <a:p xmlns:a="http://schemas.openxmlformats.org/drawingml/2006/main">
             <a:pPr algn="r">
+              <a:buNone/>
               <a:defRPr sz="1000">
                 <a:solidFill>
                   <a:srgbClr val="000000"/>
@@ -2357,6 +2453,7 @@
           <a:lstStyle xmlns:a="http://schemas.openxmlformats.org/drawingml/2006/main"/>
           <a:p xmlns:a="http://schemas.openxmlformats.org/drawingml/2006/main">
             <a:pPr algn="l">
+              <a:buNone/>
               <a:defRPr sz="2900">
                 <a:solidFill>
                   <a:srgbClr val="000000"/>
@@ -2402,6 +2499,7 @@
           <a:lstStyle xmlns:a="http://schemas.openxmlformats.org/drawingml/2006/main"/>
           <a:p xmlns:a="http://schemas.openxmlformats.org/drawingml/2006/main">
             <a:pPr algn="l">
+              <a:buNone/>
               <a:defRPr sz="2400">
                 <a:solidFill>
                   <a:srgbClr val="000000"/>
@@ -2417,6 +2515,7 @@
           </a:p>
           <a:p xmlns:a="http://schemas.openxmlformats.org/drawingml/2006/main">
             <a:pPr algn="l">
+              <a:buNone/>
               <a:defRPr sz="2400">
                 <a:solidFill>
                   <a:srgbClr val="000000"/>
@@ -2464,6 +2563,7 @@
           <a:lstStyle xmlns:a="http://schemas.openxmlformats.org/drawingml/2006/main"/>
           <a:p xmlns:a="http://schemas.openxmlformats.org/drawingml/2006/main">
             <a:pPr algn="l">
+              <a:buNone/>
               <a:defRPr sz="2400">
                 <a:solidFill>
                   <a:srgbClr val="000000"/>
@@ -2479,6 +2579,7 @@
           </a:p>
           <a:p xmlns:a="http://schemas.openxmlformats.org/drawingml/2006/main">
             <a:pPr algn="l">
+              <a:buNone/>
               <a:defRPr sz="2400">
                 <a:solidFill>
                   <a:srgbClr val="000000"/>
@@ -2526,6 +2627,7 @@
           <a:lstStyle xmlns:a="http://schemas.openxmlformats.org/drawingml/2006/main"/>
           <a:p xmlns:a="http://schemas.openxmlformats.org/drawingml/2006/main">
             <a:pPr algn="l">
+              <a:buNone/>
               <a:defRPr sz="2400">
                 <a:solidFill>
                   <a:srgbClr val="000000"/>
@@ -2541,6 +2643,7 @@
           </a:p>
           <a:p xmlns:a="http://schemas.openxmlformats.org/drawingml/2006/main">
             <a:pPr algn="l">
+              <a:buNone/>
               <a:defRPr sz="2400">
                 <a:solidFill>
                   <a:srgbClr val="000000"/>
@@ -2552,7 +2655,13 @@
             </a:pPr>
             <a:r>
               <a:t>Planner·Resolver
-검색·증거 검증
+</a:t>
+            </a:r>
+            <a:r>
+              <a:t>Archive 검증·마스킹</a:t>
+            </a:r>
+            <a:r>
+              <a:t>
 보류 정책</a:t>
             </a:r>
           </a:p>
@@ -2610,6 +2719,7 @@
           <a:lstStyle xmlns:a="http://schemas.openxmlformats.org/drawingml/2006/main"/>
           <a:p xmlns:a="http://schemas.openxmlformats.org/drawingml/2006/main">
             <a:pPr algn="r">
+              <a:buNone/>
               <a:defRPr sz="1000">
                 <a:solidFill>
                   <a:srgbClr val="000000"/>
@@ -2655,6 +2765,7 @@
           <a:lstStyle xmlns:a="http://schemas.openxmlformats.org/drawingml/2006/main"/>
           <a:p xmlns:a="http://schemas.openxmlformats.org/drawingml/2006/main">
             <a:pPr algn="l">
+              <a:buNone/>
               <a:defRPr sz="2900">
                 <a:solidFill>
                   <a:srgbClr val="000000"/>
@@ -2735,6 +2846,7 @@
           <a:lstStyle xmlns:a="http://schemas.openxmlformats.org/drawingml/2006/main"/>
           <a:p xmlns:a="http://schemas.openxmlformats.org/drawingml/2006/main">
             <a:pPr algn="l">
+              <a:buNone/>
               <a:defRPr sz="2400">
                 <a:solidFill>
                   <a:srgbClr val="000000"/>
@@ -2750,6 +2862,7 @@
           </a:p>
           <a:p xmlns:a="http://schemas.openxmlformats.org/drawingml/2006/main">
             <a:pPr algn="l">
+              <a:buNone/>
               <a:defRPr sz="2400">
                 <a:solidFill>
                   <a:srgbClr val="000000"/>
@@ -2768,14 +2881,14 @@
       </p:sp>
       <p:pic>
         <p:nvPicPr>
-          <p:cNvPr id="11" name=""/>
+          <p:cNvPr id="13" name=""/>
           <p:cNvPicPr>
             <a:picLocks xmlns:a="http://schemas.openxmlformats.org/drawingml/2006/main" noChangeAspect="1"/>
           </p:cNvPicPr>
           <p:nvPr/>
         </p:nvPicPr>
         <p:blipFill>
-          <a:blip xmlns:r="http://schemas.openxmlformats.org/officeDocument/2006/relationships" xmlns:a="http://schemas.openxmlformats.org/drawingml/2006/main" r:embed="Rfd4db410f3ce475c"/>
+          <a:blip xmlns:r="http://schemas.openxmlformats.org/officeDocument/2006/relationships" xmlns:a="http://schemas.openxmlformats.org/drawingml/2006/main" r:embed="R920689b3182a4046"/>
           <a:stretch xmlns:a="http://schemas.openxmlformats.org/drawingml/2006/main"/>
         </p:blipFill>
         <p:spPr>
@@ -2814,97 +2927,10 @@
       </p:grpSpPr>
       <p:sp>
         <p:nvSpPr>
-          <p:cNvPr id="13" name="Rounded-Rectangle-5-1">
-            <a:extLst xmlns:a="http://schemas.openxmlformats.org/drawingml/2006/main">
-              <a:ext uri="{FF2B5EF4-FFF2-40B4-BE49-F238E27FC236}">
-                <a16:creationId xmlns:a16="http://schemas.microsoft.com/office/drawing/2014/main" id="{78CC3119-2D6D-481C-943F-CFA7FCB59146}"/>
-              </a:ext>
-            </a:extLst>
-          </p:cNvPr>
-          <p:cNvSpPr>
-            <a:spLocks xmlns:a="http://schemas.openxmlformats.org/drawingml/2006/main" noGrp="1"/>
-          </p:cNvSpPr>
-          <p:nvPr/>
-        </p:nvSpPr>
-        <p:spPr>
-          <a:xfrm xmlns:a="http://schemas.openxmlformats.org/drawingml/2006/main">
-            <a:off x="393668" y="3022568"/>
-            <a:ext cx="3568732" cy="2971800"/>
-          </a:xfrm>
-          <a:prstGeom xmlns:a="http://schemas.openxmlformats.org/drawingml/2006/main" prst="roundRect">
-            <a:avLst>
-              <a:gd name="adj" fmla="val 2564"/>
-            </a:avLst>
-          </a:prstGeom>
-          <a:solidFill xmlns:a="http://schemas.openxmlformats.org/drawingml/2006/main">
-            <a:srgbClr val="F2F2F2"/>
-          </a:solidFill>
-        </p:spPr>
-      </p:sp>
-      <p:sp>
-        <p:nvSpPr>
-          <p:cNvPr id="2" name="Rounded-Rectangle-6-2">
-            <a:extLst xmlns:a="http://schemas.openxmlformats.org/drawingml/2006/main">
-              <a:ext uri="{FF2B5EF4-FFF2-40B4-BE49-F238E27FC236}">
-                <a16:creationId xmlns:a16="http://schemas.microsoft.com/office/drawing/2014/main" id="{ABF8C13D-9917-4C64-ABB3-AC18EC755ADC}"/>
-              </a:ext>
-            </a:extLst>
-          </p:cNvPr>
-          <p:cNvSpPr>
-            <a:spLocks xmlns:a="http://schemas.openxmlformats.org/drawingml/2006/main" noGrp="1"/>
-          </p:cNvSpPr>
-          <p:nvPr/>
-        </p:nvSpPr>
-        <p:spPr>
-          <a:xfrm xmlns:a="http://schemas.openxmlformats.org/drawingml/2006/main">
-            <a:off x="4311682" y="3022568"/>
-            <a:ext cx="3568732" cy="2971800"/>
-          </a:xfrm>
-          <a:prstGeom xmlns:a="http://schemas.openxmlformats.org/drawingml/2006/main" prst="roundRect">
-            <a:avLst>
-              <a:gd name="adj" fmla="val 2564"/>
-            </a:avLst>
-          </a:prstGeom>
-          <a:solidFill xmlns:a="http://schemas.openxmlformats.org/drawingml/2006/main">
-            <a:srgbClr val="F2F2F2"/>
-          </a:solidFill>
-        </p:spPr>
-      </p:sp>
-      <p:sp>
-        <p:nvSpPr>
-          <p:cNvPr id="3" name="Rounded-Rectangle-7-3">
-            <a:extLst xmlns:a="http://schemas.openxmlformats.org/drawingml/2006/main">
-              <a:ext uri="{FF2B5EF4-FFF2-40B4-BE49-F238E27FC236}">
-                <a16:creationId xmlns:a16="http://schemas.microsoft.com/office/drawing/2014/main" id="{F90722A8-4BA0-4BD5-B660-15A95E96E233}"/>
-              </a:ext>
-            </a:extLst>
-          </p:cNvPr>
-          <p:cNvSpPr>
-            <a:spLocks xmlns:a="http://schemas.openxmlformats.org/drawingml/2006/main" noGrp="1"/>
-          </p:cNvSpPr>
-          <p:nvPr/>
-        </p:nvSpPr>
-        <p:spPr>
-          <a:xfrm xmlns:a="http://schemas.openxmlformats.org/drawingml/2006/main">
-            <a:off x="8232267" y="3022568"/>
-            <a:ext cx="3568732" cy="2971800"/>
-          </a:xfrm>
-          <a:prstGeom xmlns:a="http://schemas.openxmlformats.org/drawingml/2006/main" prst="roundRect">
-            <a:avLst>
-              <a:gd name="adj" fmla="val 2564"/>
-            </a:avLst>
-          </a:prstGeom>
-          <a:solidFill xmlns:a="http://schemas.openxmlformats.org/drawingml/2006/main">
-            <a:srgbClr val="F2F2F2"/>
-          </a:solidFill>
-        </p:spPr>
-      </p:sp>
-      <p:sp>
-        <p:nvSpPr>
-          <p:cNvPr id="4" name="Slide-Number-Placeholder-1-4">
-            <a:extLst xmlns:a="http://schemas.openxmlformats.org/drawingml/2006/main">
-              <a:ext uri="{FF2B5EF4-FFF2-40B4-BE49-F238E27FC236}">
-                <a16:creationId xmlns:a16="http://schemas.microsoft.com/office/drawing/2014/main" id="{A284B142-E8C8-487D-BE2A-E8676AD3E3D1}"/>
+          <p:cNvPr id="6" name="Google-Shape-532-p58-2">
+            <a:extLst xmlns:a="http://schemas.openxmlformats.org/drawingml/2006/main">
+              <a:ext uri="{FF2B5EF4-FFF2-40B4-BE49-F238E27FC236}">
+                <a16:creationId xmlns:a16="http://schemas.microsoft.com/office/drawing/2014/main" id="{3E202D57-C6EC-49C4-9E65-8141AF002FF2}"/>
               </a:ext>
             </a:extLst>
           </p:cNvPr>
@@ -2923,10 +2949,13 @@
           </a:prstGeom>
         </p:spPr>
         <p:txBody>
-          <a:bodyPr xmlns:a="http://schemas.openxmlformats.org/drawingml/2006/main" lIns="0" tIns="0" rIns="0" bIns="0" anchor="b"/>
+          <a:bodyPr xmlns:a="http://schemas.openxmlformats.org/drawingml/2006/main" wrap="square" lIns="0" tIns="0" rIns="0" bIns="0" anchor="b">
+            <a:noAutofit/>
+          </a:bodyPr>
           <a:lstStyle xmlns:a="http://schemas.openxmlformats.org/drawingml/2006/main"/>
           <a:p xmlns:a="http://schemas.openxmlformats.org/drawingml/2006/main">
             <a:pPr algn="r">
+              <a:buNone/>
               <a:defRPr sz="1000">
                 <a:solidFill>
                   <a:srgbClr val="000000"/>
@@ -2944,10 +2973,10 @@
       </p:sp>
       <p:sp>
         <p:nvSpPr>
-          <p:cNvPr id="5" name="Title-2-5">
-            <a:extLst xmlns:a="http://schemas.openxmlformats.org/drawingml/2006/main">
-              <a:ext uri="{FF2B5EF4-FFF2-40B4-BE49-F238E27FC236}">
-                <a16:creationId xmlns:a16="http://schemas.microsoft.com/office/drawing/2014/main" id="{3FFB5E7A-9C45-461C-85BD-4C1C8FF39DC4}"/>
+          <p:cNvPr id="2" name="Google-Shape-533-p58-3">
+            <a:extLst xmlns:a="http://schemas.openxmlformats.org/drawingml/2006/main">
+              <a:ext uri="{FF2B5EF4-FFF2-40B4-BE49-F238E27FC236}">
+                <a16:creationId xmlns:a16="http://schemas.microsoft.com/office/drawing/2014/main" id="{F64B21F6-04C6-4897-AB83-CA3C8438A26F}"/>
               </a:ext>
             </a:extLst>
           </p:cNvPr>
@@ -2966,12 +2995,13 @@
           </a:prstGeom>
         </p:spPr>
         <p:txBody>
-          <a:bodyPr xmlns:a="http://schemas.openxmlformats.org/drawingml/2006/main" lIns="0" tIns="0" rIns="0" bIns="0" anchor="t">
-            <a:normAutofit fontScale="100000"/>
+          <a:bodyPr xmlns:a="http://schemas.openxmlformats.org/drawingml/2006/main" wrap="square" lIns="0" tIns="0" rIns="0" bIns="0" anchor="t">
+            <a:noAutofit/>
           </a:bodyPr>
           <a:lstStyle xmlns:a="http://schemas.openxmlformats.org/drawingml/2006/main"/>
           <a:p xmlns:a="http://schemas.openxmlformats.org/drawingml/2006/main">
             <a:pPr algn="l">
+              <a:buNone/>
               <a:defRPr sz="2900">
                 <a:solidFill>
                   <a:srgbClr val="000000"/>
@@ -2982,29 +3012,99 @@
               </a:defRPr>
             </a:pPr>
             <a:r>
-              <a:t>회귀·계약·오케스트레이션을 함께 통과했다</a:t>
-            </a:r>
-          </a:p>
-        </p:txBody>
-      </p:sp>
-      <p:sp>
-        <p:nvSpPr>
-          <p:cNvPr id="6" name="Content-Placeholder-9-6">
-            <a:extLst xmlns:a="http://schemas.openxmlformats.org/drawingml/2006/main">
-              <a:ext uri="{FF2B5EF4-FFF2-40B4-BE49-F238E27FC236}">
-                <a16:creationId xmlns:a16="http://schemas.microsoft.com/office/drawing/2014/main" id="{6C3944B3-C23B-4773-A03E-78149E4A9072}"/>
-              </a:ext>
-            </a:extLst>
-          </p:cNvPr>
-          <p:cNvSpPr>
-            <a:spLocks xmlns:a="http://schemas.openxmlformats.org/drawingml/2006/main" noGrp="1"/>
-          </p:cNvSpPr>
-          <p:nvPr/>
-        </p:nvSpPr>
-        <p:spPr>
-          <a:xfrm xmlns:a="http://schemas.openxmlformats.org/drawingml/2006/main">
-            <a:off x="702374" y="4900613"/>
-            <a:ext cx="2949607" cy="819150"/>
+              <a:t>로그는 검증된 구간만 AI 증거가 된다</a:t>
+            </a:r>
+          </a:p>
+        </p:txBody>
+      </p:sp>
+      <p:sp>
+        <p:nvSpPr>
+          <p:cNvPr id="3" name="Google-Shape-534-p58-4">
+            <a:extLst xmlns:a="http://schemas.openxmlformats.org/drawingml/2006/main">
+              <a:ext uri="{FF2B5EF4-FFF2-40B4-BE49-F238E27FC236}">
+                <a16:creationId xmlns:a16="http://schemas.microsoft.com/office/drawing/2014/main" id="{3E262E8D-7E4A-4685-B265-746C8A4C4179}"/>
+              </a:ext>
+            </a:extLst>
+          </p:cNvPr>
+          <p:cNvSpPr>
+            <a:spLocks xmlns:a="http://schemas.openxmlformats.org/drawingml/2006/main" noGrp="1"/>
+          </p:cNvSpPr>
+          <p:nvPr/>
+        </p:nvSpPr>
+        <p:spPr>
+          <a:xfrm xmlns:a="http://schemas.openxmlformats.org/drawingml/2006/main">
+            <a:off x="393668" y="3365468"/>
+            <a:ext cx="3568732" cy="2628900"/>
+          </a:xfrm>
+          <a:prstGeom xmlns:a="http://schemas.openxmlformats.org/drawingml/2006/main" prst="rect">
+            <a:avLst/>
+          </a:prstGeom>
+        </p:spPr>
+        <p:txBody>
+          <a:bodyPr xmlns:a="http://schemas.openxmlformats.org/drawingml/2006/main" wrap="square" lIns="0" tIns="0" rIns="0" bIns="0" anchor="t">
+            <a:noAutofit/>
+          </a:bodyPr>
+          <a:lstStyle xmlns:a="http://schemas.openxmlformats.org/drawingml/2006/main"/>
+          <a:p xmlns:a="http://schemas.openxmlformats.org/drawingml/2006/main">
+            <a:pPr algn="l">
+              <a:buNone/>
+              <a:defRPr sz="2400">
+                <a:solidFill>
+                  <a:srgbClr val="000000"/>
+                </a:solidFill>
+                <a:latin typeface="Helvetica Neue"/>
+                <a:ea typeface="Helvetica Neue"/>
+                <a:cs typeface="Helvetica Neue"/>
+              </a:defRPr>
+            </a:pPr>
+            <a:r>
+              <a:t>Upload</a:t>
+            </a:r>
+          </a:p>
+          <a:p xmlns:a="http://schemas.openxmlformats.org/drawingml/2006/main">
+            <a:pPr algn="l">
+              <a:buNone/>
+              <a:defRPr sz="2400">
+                <a:solidFill>
+                  <a:srgbClr val="000000"/>
+                </a:solidFill>
+                <a:latin typeface="Helvetica Neue"/>
+                <a:ea typeface="Helvetica Neue"/>
+                <a:cs typeface="Helvetica Neue"/>
+              </a:defRPr>
+            </a:pPr>
+            <a:r>
+              <a:t>D0 Artifact 수신</a:t>
+            </a:r>
+            <a:br/>
+            <a:r>
+              <a:t>ID만 Flow 전달</a:t>
+            </a:r>
+            <a:br/>
+            <a:r>
+              <a:t>바이트 미보관</a:t>
+            </a:r>
+          </a:p>
+        </p:txBody>
+      </p:sp>
+      <p:sp>
+        <p:nvSpPr>
+          <p:cNvPr id="4" name="Content-Placeholder-1-5">
+            <a:extLst xmlns:a="http://schemas.openxmlformats.org/drawingml/2006/main">
+              <a:ext uri="{FF2B5EF4-FFF2-40B4-BE49-F238E27FC236}">
+                <a16:creationId xmlns:a16="http://schemas.microsoft.com/office/drawing/2014/main" id="{4025D3BE-8F44-46F7-BD36-5C7E8FABF0DA}"/>
+              </a:ext>
+            </a:extLst>
+          </p:cNvPr>
+          <p:cNvSpPr>
+            <a:spLocks xmlns:a="http://schemas.openxmlformats.org/drawingml/2006/main" noGrp="1"/>
+          </p:cNvSpPr>
+          <p:nvPr/>
+        </p:nvSpPr>
+        <p:spPr>
+          <a:xfrm xmlns:a="http://schemas.openxmlformats.org/drawingml/2006/main">
+            <a:off x="8229600" y="3365468"/>
+            <a:ext cx="3568732" cy="2628900"/>
           </a:xfrm>
           <a:prstGeom xmlns:a="http://schemas.openxmlformats.org/drawingml/2006/main" prst="rect">
             <a:avLst/>
@@ -3017,6 +3117,7 @@
           <a:lstStyle xmlns:a="http://schemas.openxmlformats.org/drawingml/2006/main"/>
           <a:p xmlns:a="http://schemas.openxmlformats.org/drawingml/2006/main">
             <a:pPr algn="l">
+              <a:buNone/>
               <a:defRPr sz="2400">
                 <a:solidFill>
                   <a:srgbClr val="000000"/>
@@ -3027,41 +3128,12 @@
               </a:defRPr>
             </a:pPr>
             <a:r>
-              <a:t>단위·계약 시험 PASS</a:t>
-            </a:r>
-          </a:p>
-        </p:txBody>
-      </p:sp>
-      <p:sp>
-        <p:nvSpPr>
-          <p:cNvPr id="7" name="Content-Placeholder-10-7">
-            <a:extLst xmlns:a="http://schemas.openxmlformats.org/drawingml/2006/main">
-              <a:ext uri="{FF2B5EF4-FFF2-40B4-BE49-F238E27FC236}">
-                <a16:creationId xmlns:a16="http://schemas.microsoft.com/office/drawing/2014/main" id="{D4A2AB8A-97A7-45D3-B2DF-EB6F4A07B509}"/>
-              </a:ext>
-            </a:extLst>
-          </p:cNvPr>
-          <p:cNvSpPr>
-            <a:spLocks xmlns:a="http://schemas.openxmlformats.org/drawingml/2006/main" noGrp="1"/>
-          </p:cNvSpPr>
-          <p:nvPr/>
-        </p:nvSpPr>
-        <p:spPr>
-          <a:xfrm xmlns:a="http://schemas.openxmlformats.org/drawingml/2006/main">
-            <a:off x="8541830" y="4900613"/>
-            <a:ext cx="2949607" cy="819150"/>
-          </a:xfrm>
-          <a:prstGeom xmlns:a="http://schemas.openxmlformats.org/drawingml/2006/main" prst="rect">
-            <a:avLst/>
-          </a:prstGeom>
-        </p:spPr>
-        <p:txBody>
-          <a:bodyPr xmlns:a="http://schemas.openxmlformats.org/drawingml/2006/main" lIns="91440" tIns="45720" rIns="91440" bIns="45720">
-            <a:normAutofit fontScale="99479"/>
-          </a:bodyPr>
-          <a:lstStyle xmlns:a="http://schemas.openxmlformats.org/drawingml/2006/main"/>
+              <a:t>Evidence</a:t>
+            </a:r>
+          </a:p>
           <a:p xmlns:a="http://schemas.openxmlformats.org/drawingml/2006/main">
             <a:pPr algn="l">
+              <a:buNone/>
               <a:defRPr sz="2400">
                 <a:solidFill>
                   <a:srgbClr val="000000"/>
@@ -3072,29 +3144,37 @@
               </a:defRPr>
             </a:pPr>
             <a:r>
-              <a:t>Activepieces Flow ENABLED</a:t>
-            </a:r>
-          </a:p>
-        </p:txBody>
-      </p:sp>
-      <p:sp>
-        <p:nvSpPr>
-          <p:cNvPr id="8" name="Content-Placeholder-11-8">
-            <a:extLst xmlns:a="http://schemas.openxmlformats.org/drawingml/2006/main">
-              <a:ext uri="{FF2B5EF4-FFF2-40B4-BE49-F238E27FC236}">
-                <a16:creationId xmlns:a16="http://schemas.microsoft.com/office/drawing/2014/main" id="{2CEA6B8C-4E0A-4E88-AD8C-0493B958A467}"/>
-              </a:ext>
-            </a:extLst>
-          </p:cNvPr>
-          <p:cNvSpPr>
-            <a:spLocks xmlns:a="http://schemas.openxmlformats.org/drawingml/2006/main" noGrp="1"/>
-          </p:cNvSpPr>
-          <p:nvPr/>
-        </p:nvSpPr>
-        <p:spPr>
-          <a:xfrm xmlns:a="http://schemas.openxmlformats.org/drawingml/2006/main">
-            <a:off x="4621244" y="4900613"/>
-            <a:ext cx="2949607" cy="819150"/>
+              <a:t>Member·행 범위</a:t>
+            </a:r>
+            <a:br/>
+            <a:r>
+              <a:t>소스와 종합</a:t>
+            </a:r>
+            <a:br/>
+            <a:r>
+              <a:t>근거 부족 시 보류</a:t>
+            </a:r>
+          </a:p>
+        </p:txBody>
+      </p:sp>
+      <p:sp>
+        <p:nvSpPr>
+          <p:cNvPr id="5" name="Content-Placeholder-2-6">
+            <a:extLst xmlns:a="http://schemas.openxmlformats.org/drawingml/2006/main">
+              <a:ext uri="{FF2B5EF4-FFF2-40B4-BE49-F238E27FC236}">
+                <a16:creationId xmlns:a16="http://schemas.microsoft.com/office/drawing/2014/main" id="{05D12A6E-52E6-43E6-84C2-008E0552B2CA}"/>
+              </a:ext>
+            </a:extLst>
+          </p:cNvPr>
+          <p:cNvSpPr>
+            <a:spLocks xmlns:a="http://schemas.openxmlformats.org/drawingml/2006/main" noGrp="1"/>
+          </p:cNvSpPr>
+          <p:nvPr/>
+        </p:nvSpPr>
+        <p:spPr>
+          <a:xfrm xmlns:a="http://schemas.openxmlformats.org/drawingml/2006/main">
+            <a:off x="4311682" y="3365468"/>
+            <a:ext cx="3568732" cy="2628900"/>
           </a:xfrm>
           <a:prstGeom xmlns:a="http://schemas.openxmlformats.org/drawingml/2006/main" prst="rect">
             <a:avLst/>
@@ -3107,6 +3187,7 @@
           <a:lstStyle xmlns:a="http://schemas.openxmlformats.org/drawingml/2006/main"/>
           <a:p xmlns:a="http://schemas.openxmlformats.org/drawingml/2006/main">
             <a:pPr algn="l">
+              <a:buNone/>
               <a:defRPr sz="2400">
                 <a:solidFill>
                   <a:srgbClr val="000000"/>
@@ -3117,41 +3198,12 @@
               </a:defRPr>
             </a:pPr>
             <a:r>
-              <a:t>OpenAPI Operations</a:t>
-            </a:r>
-          </a:p>
-        </p:txBody>
-      </p:sp>
-      <p:sp>
-        <p:nvSpPr>
-          <p:cNvPr id="9" name="Content-Placeholder-9-9">
-            <a:extLst xmlns:a="http://schemas.openxmlformats.org/drawingml/2006/main">
-              <a:ext uri="{FF2B5EF4-FFF2-40B4-BE49-F238E27FC236}">
-                <a16:creationId xmlns:a16="http://schemas.microsoft.com/office/drawing/2014/main" id="{9F0165D7-4FC6-428A-951A-8924DD6E872A}"/>
-              </a:ext>
-            </a:extLst>
-          </p:cNvPr>
-          <p:cNvSpPr>
-            <a:spLocks xmlns:a="http://schemas.openxmlformats.org/drawingml/2006/main" noGrp="1"/>
-          </p:cNvSpPr>
-          <p:nvPr/>
-        </p:nvSpPr>
-        <p:spPr>
-          <a:xfrm xmlns:a="http://schemas.openxmlformats.org/drawingml/2006/main">
-            <a:off x="702374" y="3429000"/>
-            <a:ext cx="2940082" cy="1359313"/>
-          </a:xfrm>
-          <a:prstGeom xmlns:a="http://schemas.openxmlformats.org/drawingml/2006/main" prst="rect">
-            <a:avLst/>
-          </a:prstGeom>
-        </p:spPr>
-        <p:txBody>
-          <a:bodyPr xmlns:a="http://schemas.openxmlformats.org/drawingml/2006/main" lIns="0" tIns="0" rIns="0" bIns="0" anchor="b">
-            <a:normAutofit fontScale="100000"/>
-          </a:bodyPr>
-          <a:lstStyle xmlns:a="http://schemas.openxmlformats.org/drawingml/2006/main"/>
+              <a:t>Validate</a:t>
+            </a:r>
+          </a:p>
           <a:p xmlns:a="http://schemas.openxmlformats.org/drawingml/2006/main">
             <a:pPr algn="l">
+              <a:buNone/>
               <a:defRPr sz="2400">
                 <a:solidFill>
                   <a:srgbClr val="000000"/>
@@ -3162,157 +3214,15 @@
               </a:defRPr>
             </a:pPr>
             <a:r>
-              <a:t>118 / 118</a:t>
-            </a:r>
-          </a:p>
-        </p:txBody>
-      </p:sp>
-      <p:sp>
-        <p:nvSpPr>
-          <p:cNvPr id="10" name="Content-Placeholder-9-10">
-            <a:extLst xmlns:a="http://schemas.openxmlformats.org/drawingml/2006/main">
-              <a:ext uri="{FF2B5EF4-FFF2-40B4-BE49-F238E27FC236}">
-                <a16:creationId xmlns:a16="http://schemas.microsoft.com/office/drawing/2014/main" id="{3D3A8AFE-ACD7-49B8-A591-897DA04C22FA}"/>
-              </a:ext>
-            </a:extLst>
-          </p:cNvPr>
-          <p:cNvSpPr>
-            <a:spLocks xmlns:a="http://schemas.openxmlformats.org/drawingml/2006/main" noGrp="1"/>
-          </p:cNvSpPr>
-          <p:nvPr/>
-        </p:nvSpPr>
-        <p:spPr>
-          <a:xfrm xmlns:a="http://schemas.openxmlformats.org/drawingml/2006/main">
-            <a:off x="4612958" y="3429000"/>
-            <a:ext cx="2940082" cy="1359313"/>
-          </a:xfrm>
-          <a:prstGeom xmlns:a="http://schemas.openxmlformats.org/drawingml/2006/main" prst="rect">
-            <a:avLst/>
-          </a:prstGeom>
-        </p:spPr>
-        <p:txBody>
-          <a:bodyPr xmlns:a="http://schemas.openxmlformats.org/drawingml/2006/main" lIns="0" tIns="0" rIns="0" bIns="0" anchor="b">
-            <a:normAutofit fontScale="100000"/>
-          </a:bodyPr>
-          <a:lstStyle xmlns:a="http://schemas.openxmlformats.org/drawingml/2006/main"/>
-          <a:p xmlns:a="http://schemas.openxmlformats.org/drawingml/2006/main">
-            <a:pPr algn="l">
-              <a:defRPr sz="2400">
-                <a:solidFill>
-                  <a:srgbClr val="000000"/>
-                </a:solidFill>
-                <a:latin typeface="Helvetica Neue"/>
-                <a:ea typeface="Helvetica Neue"/>
-                <a:cs typeface="Helvetica Neue"/>
-              </a:defRPr>
-            </a:pPr>
-            <a:r>
-              <a:t>27</a:t>
-            </a:r>
-          </a:p>
-        </p:txBody>
-      </p:sp>
-      <p:sp>
-        <p:nvSpPr>
-          <p:cNvPr id="11" name="Content-Placeholder-9-11">
-            <a:extLst xmlns:a="http://schemas.openxmlformats.org/drawingml/2006/main">
-              <a:ext uri="{FF2B5EF4-FFF2-40B4-BE49-F238E27FC236}">
-                <a16:creationId xmlns:a16="http://schemas.microsoft.com/office/drawing/2014/main" id="{FE30D113-51F2-4E2C-AA04-B4F75F827CF5}"/>
-              </a:ext>
-            </a:extLst>
-          </p:cNvPr>
-          <p:cNvSpPr>
-            <a:spLocks xmlns:a="http://schemas.openxmlformats.org/drawingml/2006/main" noGrp="1"/>
-          </p:cNvSpPr>
-          <p:nvPr/>
-        </p:nvSpPr>
-        <p:spPr>
-          <a:xfrm xmlns:a="http://schemas.openxmlformats.org/drawingml/2006/main">
-            <a:off x="8562404" y="3429000"/>
-            <a:ext cx="2940082" cy="1359313"/>
-          </a:xfrm>
-          <a:prstGeom xmlns:a="http://schemas.openxmlformats.org/drawingml/2006/main" prst="rect">
-            <a:avLst/>
-          </a:prstGeom>
-        </p:spPr>
-        <p:txBody>
-          <a:bodyPr xmlns:a="http://schemas.openxmlformats.org/drawingml/2006/main" lIns="0" tIns="0" rIns="0" bIns="0" anchor="b">
-            <a:normAutofit fontScale="100000"/>
-          </a:bodyPr>
-          <a:lstStyle xmlns:a="http://schemas.openxmlformats.org/drawingml/2006/main"/>
-          <a:p xmlns:a="http://schemas.openxmlformats.org/drawingml/2006/main">
-            <a:pPr algn="l">
-              <a:defRPr sz="2400">
-                <a:solidFill>
-                  <a:srgbClr val="000000"/>
-                </a:solidFill>
-                <a:latin typeface="Helvetica Neue"/>
-                <a:ea typeface="Helvetica Neue"/>
-                <a:cs typeface="Helvetica Neue"/>
-              </a:defRPr>
-            </a:pPr>
-            <a:r>
-              <a:t>2</a:t>
-            </a:r>
-          </a:p>
-        </p:txBody>
-      </p:sp>
-      <p:sp>
-        <p:nvSpPr>
-          <p:cNvPr id="12" name="Content-Placeholder-15-12">
-            <a:extLst xmlns:a="http://schemas.openxmlformats.org/drawingml/2006/main">
-              <a:ext uri="{FF2B5EF4-FFF2-40B4-BE49-F238E27FC236}">
-                <a16:creationId xmlns:a16="http://schemas.microsoft.com/office/drawing/2014/main" id="{4A90C668-9A0F-440A-B3FC-104304B5A5A1}"/>
-              </a:ext>
-            </a:extLst>
-          </p:cNvPr>
-          <p:cNvSpPr>
-            <a:spLocks xmlns:a="http://schemas.openxmlformats.org/drawingml/2006/main" noGrp="1"/>
-          </p:cNvSpPr>
-          <p:nvPr/>
-        </p:nvSpPr>
-        <p:spPr>
-          <a:xfrm xmlns:a="http://schemas.openxmlformats.org/drawingml/2006/main">
-            <a:off x="393668" y="1138333"/>
-            <a:ext cx="11404568" cy="1599438"/>
-          </a:xfrm>
-          <a:prstGeom xmlns:a="http://schemas.openxmlformats.org/drawingml/2006/main" prst="rect">
-            <a:avLst/>
-          </a:prstGeom>
-        </p:spPr>
-        <p:txBody>
-          <a:bodyPr xmlns:a="http://schemas.openxmlformats.org/drawingml/2006/main" lIns="0" tIns="0" rIns="0" bIns="0">
-            <a:noAutofit/>
-          </a:bodyPr>
-          <a:lstStyle xmlns:a="http://schemas.openxmlformats.org/drawingml/2006/main"/>
-          <a:p xmlns:a="http://schemas.openxmlformats.org/drawingml/2006/main">
-            <a:pPr algn="l">
-              <a:defRPr sz="1600">
-                <a:solidFill>
-                  <a:srgbClr val="000000"/>
-                </a:solidFill>
-                <a:latin typeface="Helvetica Neue"/>
-                <a:ea typeface="Helvetica Neue"/>
-                <a:cs typeface="Helvetica Neue"/>
-              </a:defRPr>
-            </a:pPr>
-            <a:r>
-              <a:t>검증 기준</a:t>
-            </a:r>
-          </a:p>
-          <a:p xmlns:a="http://schemas.openxmlformats.org/drawingml/2006/main">
-            <a:pPr algn="l">
-              <a:defRPr sz="1600">
-                <a:solidFill>
-                  <a:srgbClr val="000000"/>
-                </a:solidFill>
-                <a:latin typeface="Helvetica Neue"/>
-                <a:ea typeface="Helvetica Neue"/>
-                <a:cs typeface="Helvetica Neue"/>
-              </a:defRPr>
-            </a:pPr>
-            <a:r>
-              <a:t>코드 회귀, API 계약, 실제 Flow Run을 별도로 확인했다.</a:t>
+              <a:t>경로·압축률 검사</a:t>
+            </a:r>
+            <a:br/>
+            <a:r>
+              <a:t>비밀 마스킹</a:t>
+            </a:r>
+            <a:br/>
+            <a:r>
+              <a:t>오류 구간 선별</a:t>
             </a:r>
           </a:p>
         </p:txBody>
@@ -3320,7 +3230,7 @@
     </p:spTree>
     <p:extLst>
       <p:ext uri="{BB962C8B-B14F-4D97-AF65-F5344CB8AC3E}">
-        <p14:creationId xmlns:p14="http://schemas.microsoft.com/office/powerpoint/2010/main" val="898385238"/>
+        <p14:creationId xmlns:p14="http://schemas.microsoft.com/office/powerpoint/2010/main" val="1104778017"/>
       </p:ext>
     </p:extLst>
   </p:cSld>
@@ -3341,6 +3251,543 @@
       </p:grpSpPr>
       <p:sp>
         <p:nvSpPr>
+          <p:cNvPr id="13" name="Rounded-Rectangle-5-1">
+            <a:extLst xmlns:a="http://schemas.openxmlformats.org/drawingml/2006/main">
+              <a:ext uri="{FF2B5EF4-FFF2-40B4-BE49-F238E27FC236}">
+                <a16:creationId xmlns:a16="http://schemas.microsoft.com/office/drawing/2014/main" id="{78CC3119-2D6D-481C-943F-CFA7FCB59146}"/>
+              </a:ext>
+            </a:extLst>
+          </p:cNvPr>
+          <p:cNvSpPr>
+            <a:spLocks xmlns:a="http://schemas.openxmlformats.org/drawingml/2006/main" noGrp="1"/>
+          </p:cNvSpPr>
+          <p:nvPr/>
+        </p:nvSpPr>
+        <p:spPr>
+          <a:xfrm xmlns:a="http://schemas.openxmlformats.org/drawingml/2006/main">
+            <a:off x="393668" y="3022568"/>
+            <a:ext cx="3568732" cy="2971800"/>
+          </a:xfrm>
+          <a:prstGeom xmlns:a="http://schemas.openxmlformats.org/drawingml/2006/main" prst="roundRect">
+            <a:avLst>
+              <a:gd name="adj" fmla="val 2564"/>
+            </a:avLst>
+          </a:prstGeom>
+          <a:solidFill xmlns:a="http://schemas.openxmlformats.org/drawingml/2006/main">
+            <a:srgbClr val="F2F2F2"/>
+          </a:solidFill>
+        </p:spPr>
+      </p:sp>
+      <p:sp>
+        <p:nvSpPr>
+          <p:cNvPr id="2" name="Rounded-Rectangle-6-2">
+            <a:extLst xmlns:a="http://schemas.openxmlformats.org/drawingml/2006/main">
+              <a:ext uri="{FF2B5EF4-FFF2-40B4-BE49-F238E27FC236}">
+                <a16:creationId xmlns:a16="http://schemas.microsoft.com/office/drawing/2014/main" id="{ABF8C13D-9917-4C64-ABB3-AC18EC755ADC}"/>
+              </a:ext>
+            </a:extLst>
+          </p:cNvPr>
+          <p:cNvSpPr>
+            <a:spLocks xmlns:a="http://schemas.openxmlformats.org/drawingml/2006/main" noGrp="1"/>
+          </p:cNvSpPr>
+          <p:nvPr/>
+        </p:nvSpPr>
+        <p:spPr>
+          <a:xfrm xmlns:a="http://schemas.openxmlformats.org/drawingml/2006/main">
+            <a:off x="4311682" y="3022568"/>
+            <a:ext cx="3568732" cy="2971800"/>
+          </a:xfrm>
+          <a:prstGeom xmlns:a="http://schemas.openxmlformats.org/drawingml/2006/main" prst="roundRect">
+            <a:avLst>
+              <a:gd name="adj" fmla="val 2564"/>
+            </a:avLst>
+          </a:prstGeom>
+          <a:solidFill xmlns:a="http://schemas.openxmlformats.org/drawingml/2006/main">
+            <a:srgbClr val="F2F2F2"/>
+          </a:solidFill>
+        </p:spPr>
+      </p:sp>
+      <p:sp>
+        <p:nvSpPr>
+          <p:cNvPr id="3" name="Rounded-Rectangle-7-3">
+            <a:extLst xmlns:a="http://schemas.openxmlformats.org/drawingml/2006/main">
+              <a:ext uri="{FF2B5EF4-FFF2-40B4-BE49-F238E27FC236}">
+                <a16:creationId xmlns:a16="http://schemas.microsoft.com/office/drawing/2014/main" id="{F90722A8-4BA0-4BD5-B660-15A95E96E233}"/>
+              </a:ext>
+            </a:extLst>
+          </p:cNvPr>
+          <p:cNvSpPr>
+            <a:spLocks xmlns:a="http://schemas.openxmlformats.org/drawingml/2006/main" noGrp="1"/>
+          </p:cNvSpPr>
+          <p:nvPr/>
+        </p:nvSpPr>
+        <p:spPr>
+          <a:xfrm xmlns:a="http://schemas.openxmlformats.org/drawingml/2006/main">
+            <a:off x="8232267" y="3022568"/>
+            <a:ext cx="3568732" cy="2971800"/>
+          </a:xfrm>
+          <a:prstGeom xmlns:a="http://schemas.openxmlformats.org/drawingml/2006/main" prst="roundRect">
+            <a:avLst>
+              <a:gd name="adj" fmla="val 2564"/>
+            </a:avLst>
+          </a:prstGeom>
+          <a:solidFill xmlns:a="http://schemas.openxmlformats.org/drawingml/2006/main">
+            <a:srgbClr val="F2F2F2"/>
+          </a:solidFill>
+        </p:spPr>
+      </p:sp>
+      <p:sp>
+        <p:nvSpPr>
+          <p:cNvPr id="4" name="Slide-Number-Placeholder-1-4">
+            <a:extLst xmlns:a="http://schemas.openxmlformats.org/drawingml/2006/main">
+              <a:ext uri="{FF2B5EF4-FFF2-40B4-BE49-F238E27FC236}">
+                <a16:creationId xmlns:a16="http://schemas.microsoft.com/office/drawing/2014/main" id="{A284B142-E8C8-487D-BE2A-E8676AD3E3D1}"/>
+              </a:ext>
+            </a:extLst>
+          </p:cNvPr>
+          <p:cNvSpPr>
+            <a:spLocks xmlns:a="http://schemas.openxmlformats.org/drawingml/2006/main" noGrp="1"/>
+          </p:cNvSpPr>
+          <p:nvPr/>
+        </p:nvSpPr>
+        <p:spPr>
+          <a:xfrm xmlns:a="http://schemas.openxmlformats.org/drawingml/2006/main">
+            <a:off x="11279315" y="6279261"/>
+            <a:ext cx="518922" cy="241268"/>
+          </a:xfrm>
+          <a:prstGeom xmlns:a="http://schemas.openxmlformats.org/drawingml/2006/main" prst="rect">
+            <a:avLst/>
+          </a:prstGeom>
+        </p:spPr>
+        <p:txBody>
+          <a:bodyPr xmlns:a="http://schemas.openxmlformats.org/drawingml/2006/main" lIns="0" tIns="0" rIns="0" bIns="0" anchor="b"/>
+          <a:lstStyle xmlns:a="http://schemas.openxmlformats.org/drawingml/2006/main"/>
+          <a:p xmlns:a="http://schemas.openxmlformats.org/drawingml/2006/main">
+            <a:pPr algn="r">
+              <a:buNone/>
+              <a:defRPr sz="1000">
+                <a:solidFill>
+                  <a:srgbClr val="000000"/>
+                </a:solidFill>
+                <a:latin typeface="Helvetica Neue"/>
+                <a:ea typeface="Helvetica Neue"/>
+                <a:cs typeface="Helvetica Neue"/>
+              </a:defRPr>
+            </a:pPr>
+            <a:r>
+              <a:t>6</a:t>
+            </a:r>
+          </a:p>
+        </p:txBody>
+      </p:sp>
+      <p:sp>
+        <p:nvSpPr>
+          <p:cNvPr id="5" name="Title-2-5">
+            <a:extLst xmlns:a="http://schemas.openxmlformats.org/drawingml/2006/main">
+              <a:ext uri="{FF2B5EF4-FFF2-40B4-BE49-F238E27FC236}">
+                <a16:creationId xmlns:a16="http://schemas.microsoft.com/office/drawing/2014/main" id="{3FFB5E7A-9C45-461C-85BD-4C1C8FF39DC4}"/>
+              </a:ext>
+            </a:extLst>
+          </p:cNvPr>
+          <p:cNvSpPr>
+            <a:spLocks xmlns:a="http://schemas.openxmlformats.org/drawingml/2006/main" noGrp="1"/>
+          </p:cNvSpPr>
+          <p:nvPr/>
+        </p:nvSpPr>
+        <p:spPr>
+          <a:xfrm xmlns:a="http://schemas.openxmlformats.org/drawingml/2006/main">
+            <a:off x="393668" y="344043"/>
+            <a:ext cx="11404568" cy="1047464"/>
+          </a:xfrm>
+          <a:prstGeom xmlns:a="http://schemas.openxmlformats.org/drawingml/2006/main" prst="rect">
+            <a:avLst/>
+          </a:prstGeom>
+        </p:spPr>
+        <p:txBody>
+          <a:bodyPr xmlns:a="http://schemas.openxmlformats.org/drawingml/2006/main" lIns="0" tIns="0" rIns="0" bIns="0" anchor="t">
+            <a:normAutofit fontScale="100000"/>
+          </a:bodyPr>
+          <a:lstStyle xmlns:a="http://schemas.openxmlformats.org/drawingml/2006/main"/>
+          <a:p xmlns:a="http://schemas.openxmlformats.org/drawingml/2006/main">
+            <a:pPr algn="l">
+              <a:buNone/>
+              <a:defRPr sz="2900">
+                <a:solidFill>
+                  <a:srgbClr val="000000"/>
+                </a:solidFill>
+                <a:latin typeface="Helvetica Neue"/>
+                <a:ea typeface="Helvetica Neue"/>
+                <a:cs typeface="Helvetica Neue"/>
+              </a:defRPr>
+            </a:pPr>
+            <a:r>
+              <a:t>회귀·계약·오케스트레이션을 함께 통과했다</a:t>
+            </a:r>
+          </a:p>
+        </p:txBody>
+      </p:sp>
+      <p:sp>
+        <p:nvSpPr>
+          <p:cNvPr id="6" name="Content-Placeholder-9-6">
+            <a:extLst xmlns:a="http://schemas.openxmlformats.org/drawingml/2006/main">
+              <a:ext uri="{FF2B5EF4-FFF2-40B4-BE49-F238E27FC236}">
+                <a16:creationId xmlns:a16="http://schemas.microsoft.com/office/drawing/2014/main" id="{6C3944B3-C23B-4773-A03E-78149E4A9072}"/>
+              </a:ext>
+            </a:extLst>
+          </p:cNvPr>
+          <p:cNvSpPr>
+            <a:spLocks xmlns:a="http://schemas.openxmlformats.org/drawingml/2006/main" noGrp="1"/>
+          </p:cNvSpPr>
+          <p:nvPr/>
+        </p:nvSpPr>
+        <p:spPr>
+          <a:xfrm xmlns:a="http://schemas.openxmlformats.org/drawingml/2006/main">
+            <a:off x="702374" y="4900613"/>
+            <a:ext cx="2949607" cy="819150"/>
+          </a:xfrm>
+          <a:prstGeom xmlns:a="http://schemas.openxmlformats.org/drawingml/2006/main" prst="rect">
+            <a:avLst/>
+          </a:prstGeom>
+        </p:spPr>
+        <p:txBody>
+          <a:bodyPr xmlns:a="http://schemas.openxmlformats.org/drawingml/2006/main" lIns="91440" tIns="45720" rIns="91440" bIns="45720">
+            <a:normAutofit fontScale="100000"/>
+          </a:bodyPr>
+          <a:lstStyle xmlns:a="http://schemas.openxmlformats.org/drawingml/2006/main"/>
+          <a:p xmlns:a="http://schemas.openxmlformats.org/drawingml/2006/main">
+            <a:pPr algn="l">
+              <a:buNone/>
+              <a:defRPr sz="2400">
+                <a:solidFill>
+                  <a:srgbClr val="000000"/>
+                </a:solidFill>
+                <a:latin typeface="Helvetica Neue"/>
+                <a:ea typeface="Helvetica Neue"/>
+                <a:cs typeface="Helvetica Neue"/>
+              </a:defRPr>
+            </a:pPr>
+            <a:r>
+              <a:t>단위·계약 시험 PASS</a:t>
+            </a:r>
+          </a:p>
+        </p:txBody>
+      </p:sp>
+      <p:sp>
+        <p:nvSpPr>
+          <p:cNvPr id="7" name="Content-Placeholder-10-7">
+            <a:extLst xmlns:a="http://schemas.openxmlformats.org/drawingml/2006/main">
+              <a:ext uri="{FF2B5EF4-FFF2-40B4-BE49-F238E27FC236}">
+                <a16:creationId xmlns:a16="http://schemas.microsoft.com/office/drawing/2014/main" id="{D4A2AB8A-97A7-45D3-B2DF-EB6F4A07B509}"/>
+              </a:ext>
+            </a:extLst>
+          </p:cNvPr>
+          <p:cNvSpPr>
+            <a:spLocks xmlns:a="http://schemas.openxmlformats.org/drawingml/2006/main" noGrp="1"/>
+          </p:cNvSpPr>
+          <p:nvPr/>
+        </p:nvSpPr>
+        <p:spPr>
+          <a:xfrm xmlns:a="http://schemas.openxmlformats.org/drawingml/2006/main">
+            <a:off x="8541830" y="4900613"/>
+            <a:ext cx="2949607" cy="819150"/>
+          </a:xfrm>
+          <a:prstGeom xmlns:a="http://schemas.openxmlformats.org/drawingml/2006/main" prst="rect">
+            <a:avLst/>
+          </a:prstGeom>
+        </p:spPr>
+        <p:txBody>
+          <a:bodyPr xmlns:a="http://schemas.openxmlformats.org/drawingml/2006/main" lIns="91440" tIns="45720" rIns="91440" bIns="45720">
+            <a:normAutofit fontScale="99479"/>
+          </a:bodyPr>
+          <a:lstStyle xmlns:a="http://schemas.openxmlformats.org/drawingml/2006/main"/>
+          <a:p xmlns:a="http://schemas.openxmlformats.org/drawingml/2006/main">
+            <a:pPr algn="l">
+              <a:buNone/>
+              <a:defRPr sz="2400">
+                <a:solidFill>
+                  <a:srgbClr val="000000"/>
+                </a:solidFill>
+                <a:latin typeface="Helvetica Neue"/>
+                <a:ea typeface="Helvetica Neue"/>
+                <a:cs typeface="Helvetica Neue"/>
+              </a:defRPr>
+            </a:pPr>
+            <a:r>
+              <a:t>Activepieces Flow ENABLED</a:t>
+            </a:r>
+          </a:p>
+        </p:txBody>
+      </p:sp>
+      <p:sp>
+        <p:nvSpPr>
+          <p:cNvPr id="8" name="Content-Placeholder-11-8">
+            <a:extLst xmlns:a="http://schemas.openxmlformats.org/drawingml/2006/main">
+              <a:ext uri="{FF2B5EF4-FFF2-40B4-BE49-F238E27FC236}">
+                <a16:creationId xmlns:a16="http://schemas.microsoft.com/office/drawing/2014/main" id="{2CEA6B8C-4E0A-4E88-AD8C-0493B958A467}"/>
+              </a:ext>
+            </a:extLst>
+          </p:cNvPr>
+          <p:cNvSpPr>
+            <a:spLocks xmlns:a="http://schemas.openxmlformats.org/drawingml/2006/main" noGrp="1"/>
+          </p:cNvSpPr>
+          <p:nvPr/>
+        </p:nvSpPr>
+        <p:spPr>
+          <a:xfrm xmlns:a="http://schemas.openxmlformats.org/drawingml/2006/main">
+            <a:off x="4621244" y="4900613"/>
+            <a:ext cx="2949607" cy="819150"/>
+          </a:xfrm>
+          <a:prstGeom xmlns:a="http://schemas.openxmlformats.org/drawingml/2006/main" prst="rect">
+            <a:avLst/>
+          </a:prstGeom>
+        </p:spPr>
+        <p:txBody>
+          <a:bodyPr xmlns:a="http://schemas.openxmlformats.org/drawingml/2006/main" lIns="91440" tIns="45720" rIns="91440" bIns="45720">
+            <a:normAutofit fontScale="100000"/>
+          </a:bodyPr>
+          <a:lstStyle xmlns:a="http://schemas.openxmlformats.org/drawingml/2006/main"/>
+          <a:p xmlns:a="http://schemas.openxmlformats.org/drawingml/2006/main">
+            <a:pPr algn="l">
+              <a:buNone/>
+              <a:defRPr sz="2400">
+                <a:solidFill>
+                  <a:srgbClr val="000000"/>
+                </a:solidFill>
+                <a:latin typeface="Helvetica Neue"/>
+                <a:ea typeface="Helvetica Neue"/>
+                <a:cs typeface="Helvetica Neue"/>
+              </a:defRPr>
+            </a:pPr>
+            <a:r>
+              <a:t>OpenAPI Operations</a:t>
+            </a:r>
+          </a:p>
+        </p:txBody>
+      </p:sp>
+      <p:sp>
+        <p:nvSpPr>
+          <p:cNvPr id="9" name="Content-Placeholder-9-9">
+            <a:extLst xmlns:a="http://schemas.openxmlformats.org/drawingml/2006/main">
+              <a:ext uri="{FF2B5EF4-FFF2-40B4-BE49-F238E27FC236}">
+                <a16:creationId xmlns:a16="http://schemas.microsoft.com/office/drawing/2014/main" id="{9F0165D7-4FC6-428A-951A-8924DD6E872A}"/>
+              </a:ext>
+            </a:extLst>
+          </p:cNvPr>
+          <p:cNvSpPr>
+            <a:spLocks xmlns:a="http://schemas.openxmlformats.org/drawingml/2006/main" noGrp="1"/>
+          </p:cNvSpPr>
+          <p:nvPr/>
+        </p:nvSpPr>
+        <p:spPr>
+          <a:xfrm xmlns:a="http://schemas.openxmlformats.org/drawingml/2006/main">
+            <a:off x="702374" y="3429000"/>
+            <a:ext cx="2940082" cy="1359313"/>
+          </a:xfrm>
+          <a:prstGeom xmlns:a="http://schemas.openxmlformats.org/drawingml/2006/main" prst="rect">
+            <a:avLst/>
+          </a:prstGeom>
+        </p:spPr>
+        <p:txBody>
+          <a:bodyPr xmlns:a="http://schemas.openxmlformats.org/drawingml/2006/main" lIns="0" tIns="0" rIns="0" bIns="0" anchor="b">
+            <a:normAutofit fontScale="100000"/>
+          </a:bodyPr>
+          <a:lstStyle xmlns:a="http://schemas.openxmlformats.org/drawingml/2006/main"/>
+          <a:p xmlns:a="http://schemas.openxmlformats.org/drawingml/2006/main">
+            <a:pPr algn="l">
+              <a:buNone/>
+              <a:defRPr sz="2400">
+                <a:solidFill>
+                  <a:srgbClr val="000000"/>
+                </a:solidFill>
+                <a:latin typeface="Helvetica Neue"/>
+                <a:ea typeface="Helvetica Neue"/>
+                <a:cs typeface="Helvetica Neue"/>
+              </a:defRPr>
+            </a:pPr>
+            <a:r>
+              <a:t>131 / 131</a:t>
+            </a:r>
+          </a:p>
+        </p:txBody>
+      </p:sp>
+      <p:sp>
+        <p:nvSpPr>
+          <p:cNvPr id="10" name="Content-Placeholder-9-10">
+            <a:extLst xmlns:a="http://schemas.openxmlformats.org/drawingml/2006/main">
+              <a:ext uri="{FF2B5EF4-FFF2-40B4-BE49-F238E27FC236}">
+                <a16:creationId xmlns:a16="http://schemas.microsoft.com/office/drawing/2014/main" id="{3D3A8AFE-ACD7-49B8-A591-897DA04C22FA}"/>
+              </a:ext>
+            </a:extLst>
+          </p:cNvPr>
+          <p:cNvSpPr>
+            <a:spLocks xmlns:a="http://schemas.openxmlformats.org/drawingml/2006/main" noGrp="1"/>
+          </p:cNvSpPr>
+          <p:nvPr/>
+        </p:nvSpPr>
+        <p:spPr>
+          <a:xfrm xmlns:a="http://schemas.openxmlformats.org/drawingml/2006/main">
+            <a:off x="4612958" y="3429000"/>
+            <a:ext cx="2940082" cy="1359313"/>
+          </a:xfrm>
+          <a:prstGeom xmlns:a="http://schemas.openxmlformats.org/drawingml/2006/main" prst="rect">
+            <a:avLst/>
+          </a:prstGeom>
+        </p:spPr>
+        <p:txBody>
+          <a:bodyPr xmlns:a="http://schemas.openxmlformats.org/drawingml/2006/main" lIns="0" tIns="0" rIns="0" bIns="0" anchor="b">
+            <a:normAutofit fontScale="100000"/>
+          </a:bodyPr>
+          <a:lstStyle xmlns:a="http://schemas.openxmlformats.org/drawingml/2006/main"/>
+          <a:p xmlns:a="http://schemas.openxmlformats.org/drawingml/2006/main">
+            <a:pPr algn="l">
+              <a:buNone/>
+              <a:defRPr sz="2400">
+                <a:solidFill>
+                  <a:srgbClr val="000000"/>
+                </a:solidFill>
+                <a:latin typeface="Helvetica Neue"/>
+                <a:ea typeface="Helvetica Neue"/>
+                <a:cs typeface="Helvetica Neue"/>
+              </a:defRPr>
+            </a:pPr>
+            <a:r>
+              <a:t>27</a:t>
+            </a:r>
+          </a:p>
+        </p:txBody>
+      </p:sp>
+      <p:sp>
+        <p:nvSpPr>
+          <p:cNvPr id="11" name="Content-Placeholder-9-11">
+            <a:extLst xmlns:a="http://schemas.openxmlformats.org/drawingml/2006/main">
+              <a:ext uri="{FF2B5EF4-FFF2-40B4-BE49-F238E27FC236}">
+                <a16:creationId xmlns:a16="http://schemas.microsoft.com/office/drawing/2014/main" id="{FE30D113-51F2-4E2C-AA04-B4F75F827CF5}"/>
+              </a:ext>
+            </a:extLst>
+          </p:cNvPr>
+          <p:cNvSpPr>
+            <a:spLocks xmlns:a="http://schemas.openxmlformats.org/drawingml/2006/main" noGrp="1"/>
+          </p:cNvSpPr>
+          <p:nvPr/>
+        </p:nvSpPr>
+        <p:spPr>
+          <a:xfrm xmlns:a="http://schemas.openxmlformats.org/drawingml/2006/main">
+            <a:off x="8562404" y="3429000"/>
+            <a:ext cx="2940082" cy="1359313"/>
+          </a:xfrm>
+          <a:prstGeom xmlns:a="http://schemas.openxmlformats.org/drawingml/2006/main" prst="rect">
+            <a:avLst/>
+          </a:prstGeom>
+        </p:spPr>
+        <p:txBody>
+          <a:bodyPr xmlns:a="http://schemas.openxmlformats.org/drawingml/2006/main" lIns="0" tIns="0" rIns="0" bIns="0" anchor="b">
+            <a:normAutofit fontScale="100000"/>
+          </a:bodyPr>
+          <a:lstStyle xmlns:a="http://schemas.openxmlformats.org/drawingml/2006/main"/>
+          <a:p xmlns:a="http://schemas.openxmlformats.org/drawingml/2006/main">
+            <a:pPr algn="l">
+              <a:buNone/>
+              <a:defRPr sz="2400">
+                <a:solidFill>
+                  <a:srgbClr val="000000"/>
+                </a:solidFill>
+                <a:latin typeface="Helvetica Neue"/>
+                <a:ea typeface="Helvetica Neue"/>
+                <a:cs typeface="Helvetica Neue"/>
+              </a:defRPr>
+            </a:pPr>
+            <a:r>
+              <a:t>2</a:t>
+            </a:r>
+          </a:p>
+        </p:txBody>
+      </p:sp>
+      <p:sp>
+        <p:nvSpPr>
+          <p:cNvPr id="12" name="Content-Placeholder-15-12">
+            <a:extLst xmlns:a="http://schemas.openxmlformats.org/drawingml/2006/main">
+              <a:ext uri="{FF2B5EF4-FFF2-40B4-BE49-F238E27FC236}">
+                <a16:creationId xmlns:a16="http://schemas.microsoft.com/office/drawing/2014/main" id="{4A90C668-9A0F-440A-B3FC-104304B5A5A1}"/>
+              </a:ext>
+            </a:extLst>
+          </p:cNvPr>
+          <p:cNvSpPr>
+            <a:spLocks xmlns:a="http://schemas.openxmlformats.org/drawingml/2006/main" noGrp="1"/>
+          </p:cNvSpPr>
+          <p:nvPr/>
+        </p:nvSpPr>
+        <p:spPr>
+          <a:xfrm xmlns:a="http://schemas.openxmlformats.org/drawingml/2006/main">
+            <a:off x="393668" y="1138333"/>
+            <a:ext cx="11404568" cy="1599438"/>
+          </a:xfrm>
+          <a:prstGeom xmlns:a="http://schemas.openxmlformats.org/drawingml/2006/main" prst="rect">
+            <a:avLst/>
+          </a:prstGeom>
+        </p:spPr>
+        <p:txBody>
+          <a:bodyPr xmlns:a="http://schemas.openxmlformats.org/drawingml/2006/main" lIns="0" tIns="0" rIns="0" bIns="0">
+            <a:noAutofit/>
+          </a:bodyPr>
+          <a:lstStyle xmlns:a="http://schemas.openxmlformats.org/drawingml/2006/main"/>
+          <a:p xmlns:a="http://schemas.openxmlformats.org/drawingml/2006/main">
+            <a:pPr algn="l">
+              <a:buNone/>
+              <a:defRPr sz="1600">
+                <a:solidFill>
+                  <a:srgbClr val="000000"/>
+                </a:solidFill>
+                <a:latin typeface="Helvetica Neue"/>
+                <a:ea typeface="Helvetica Neue"/>
+                <a:cs typeface="Helvetica Neue"/>
+              </a:defRPr>
+            </a:pPr>
+            <a:r>
+              <a:t>검증 기준</a:t>
+            </a:r>
+          </a:p>
+          <a:p xmlns:a="http://schemas.openxmlformats.org/drawingml/2006/main">
+            <a:pPr algn="l">
+              <a:buNone/>
+              <a:defRPr sz="1600">
+                <a:solidFill>
+                  <a:srgbClr val="000000"/>
+                </a:solidFill>
+                <a:latin typeface="Helvetica Neue"/>
+                <a:ea typeface="Helvetica Neue"/>
+                <a:cs typeface="Helvetica Neue"/>
+              </a:defRPr>
+            </a:pPr>
+            <a:r>
+              <a:t>코드 회귀, API 계약, 실제 Flow Run을 별도로 확인했다.</a:t>
+            </a:r>
+          </a:p>
+        </p:txBody>
+      </p:sp>
+    </p:spTree>
+    <p:extLst>
+      <p:ext uri="{BB962C8B-B14F-4D97-AF65-F5344CB8AC3E}">
+        <p14:creationId xmlns:p14="http://schemas.microsoft.com/office/powerpoint/2010/main" val="898385238"/>
+      </p:ext>
+    </p:extLst>
+  </p:cSld>
+</p:sld>
+</file>
+
+<file path=ppt/slides/slide7.xml><?xml version="1.0" encoding="utf-8"?>
+<p:sld xmlns:p="http://schemas.openxmlformats.org/presentationml/2006/main">
+  <p:cSld>
+    <p:spTree>
+      <p:nvGrpSpPr>
+        <p:cNvPr id="1" name=""/>
+        <p:cNvGrpSpPr/>
+        <p:nvPr/>
+      </p:nvGrpSpPr>
+      <p:grpSpPr>
+        <a:xfrm xmlns:a="http://schemas.openxmlformats.org/drawingml/2006/main"/>
+      </p:grpSpPr>
+      <p:sp>
+        <p:nvSpPr>
           <p:cNvPr id="5" name="Google-Shape-532-p58-2">
             <a:extLst xmlns:a="http://schemas.openxmlformats.org/drawingml/2006/main">
               <a:ext uri="{FF2B5EF4-FFF2-40B4-BE49-F238E27FC236}">
@@ -3369,6 +3816,7 @@
           <a:lstStyle xmlns:a="http://schemas.openxmlformats.org/drawingml/2006/main"/>
           <a:p xmlns:a="http://schemas.openxmlformats.org/drawingml/2006/main">
             <a:pPr algn="r">
+              <a:buNone/>
               <a:defRPr sz="1000">
                 <a:solidFill>
                   <a:srgbClr val="000000"/>
@@ -3379,7 +3827,7 @@
               </a:defRPr>
             </a:pPr>
             <a:r>
-              <a:t>6</a:t>
+              <a:t>7</a:t>
             </a:r>
           </a:p>
         </p:txBody>
@@ -3414,6 +3862,7 @@
           <a:lstStyle xmlns:a="http://schemas.openxmlformats.org/drawingml/2006/main"/>
           <a:p xmlns:a="http://schemas.openxmlformats.org/drawingml/2006/main">
             <a:pPr algn="l">
+              <a:buNone/>
               <a:defRPr sz="2900">
                 <a:solidFill>
                   <a:srgbClr val="000000"/>
@@ -3459,6 +3908,7 @@
           <a:lstStyle xmlns:a="http://schemas.openxmlformats.org/drawingml/2006/main"/>
           <a:p xmlns:a="http://schemas.openxmlformats.org/drawingml/2006/main">
             <a:pPr algn="l">
+              <a:buNone/>
               <a:defRPr sz="1600">
                 <a:solidFill>
                   <a:srgbClr val="000000"/>
@@ -3474,6 +3924,7 @@
           </a:p>
           <a:p xmlns:a="http://schemas.openxmlformats.org/drawingml/2006/main">
             <a:pPr algn="l">
+              <a:buNone/>
               <a:defRPr sz="1600">
                 <a:solidFill>
                   <a:srgbClr val="000000"/>
@@ -3484,14 +3935,14 @@
               </a:defRPr>
             </a:pPr>
             <a:r>
-              <a:t>종합 15건·멀티모달 12건의 질문, 허용 응답, 판정을 자산화했다.</a:t>
+              <a:t>종합 15건·이미지 12건·로그 12건, 총 39건의 허용 응답과 판정을 자산화했다.</a:t>
             </a:r>
           </a:p>
         </p:txBody>
       </p:sp>
       <p:graphicFrame>
         <p:nvGraphicFramePr>
-          <p:cNvPr id="8" name="Google-Shape-644-p93-5"/>
+          <p:cNvPr id="10" name="Google-Shape-644-p93-5"/>
           <p:cNvGraphicFramePr/>
           <p:nvPr/>
         </p:nvGraphicFramePr>
@@ -3641,7 +4092,7 @@
                     <a:lstStyle/>
                     <a:p>
                       <a:r>
-                        <a:t>멀티모달</a:t>
+                        <a:t>이미지</a:t>
                       </a:r>
                     </a:p>
                   </a:txBody>
@@ -3703,6 +4154,68 @@
                     <a:lstStyle/>
                     <a:p>
                       <a:r>
+                        <a:t>로그·압축</a:t>
+                      </a:r>
+                    </a:p>
+                  </a:txBody>
+                  <a:tcPr marL="91440" marR="91440" marT="45720" marB="45720"/>
+                </a:tc>
+                <a:tc>
+                  <a:txBody>
+                    <a:bodyPr/>
+                    <a:lstStyle/>
+                    <a:p>
+                      <a:r>
+                        <a:t>12</a:t>
+                      </a:r>
+                    </a:p>
+                  </a:txBody>
+                  <a:tcPr marL="91440" marR="91440" marT="45720" marB="45720"/>
+                </a:tc>
+                <a:tc>
+                  <a:txBody>
+                    <a:bodyPr/>
+                    <a:lstStyle/>
+                    <a:p>
+                      <a:r>
+                        <a:t>PASS</a:t>
+                      </a:r>
+                    </a:p>
+                  </a:txBody>
+                  <a:tcPr marL="91440" marR="91440" marT="45720" marB="45720"/>
+                </a:tc>
+                <a:tc>
+                  <a:txBody>
+                    <a:bodyPr/>
+                    <a:lstStyle/>
+                    <a:p>
+                      <a:r>
+                        <a:t>4건</a:t>
+                      </a:r>
+                    </a:p>
+                  </a:txBody>
+                  <a:tcPr marL="91440" marR="91440" marT="45720" marB="45720"/>
+                </a:tc>
+                <a:tc>
+                  <a:txBody>
+                    <a:bodyPr/>
+                    <a:lstStyle/>
+                    <a:p>
+                      <a:r>
+                        <a:t>마스킹·차단</a:t>
+                      </a:r>
+                    </a:p>
+                  </a:txBody>
+                  <a:tcPr marL="91440" marR="91440" marT="45720" marB="45720"/>
+                </a:tc>
+              </a:tr>
+              <a:tr h="436954">
+                <a:tc>
+                  <a:txBody>
+                    <a:bodyPr/>
+                    <a:lstStyle/>
+                    <a:p>
+                      <a:r>
                         <a:t>단위·계약 시험</a:t>
                       </a:r>
                     </a:p>
@@ -3715,7 +4228,7 @@
                     <a:lstStyle/>
                     <a:p>
                       <a:r>
-                        <a:t>118</a:t>
+                        <a:t>131</a:t>
                       </a:r>
                     </a:p>
                   </a:txBody>
@@ -3801,7 +4314,7 @@
                     <a:lstStyle/>
                     <a:p>
                       <a:r>
-                        <a:t>v0.7.0</a:t>
+                        <a:t>v0.8.0</a:t>
                       </a:r>
                     </a:p>
                   </a:txBody>
@@ -3875,7 +4388,7 @@
                     <a:lstStyle/>
                     <a:p>
                       <a:r>
-                        <a:t>내부 호출</a:t>
+                        <a:t>ID만 전달</a:t>
                       </a:r>
                     </a:p>
                   </a:txBody>
@@ -3951,7 +4464,7 @@
                     <a:lstStyle/>
                     <a:p>
                       <a:r>
-                        <a:t>보호 가드</a:t>
+                        <a:t>Health·보호 가드</a:t>
                       </a:r>
                     </a:p>
                   </a:txBody>
@@ -3987,7 +4500,7 @@
                     <a:lstStyle/>
                     <a:p>
                       <a:r>
-                        <a:t>전·후</a:t>
+                        <a:t>healthy</a:t>
                       </a:r>
                     </a:p>
                   </a:txBody>
@@ -4000,68 +4513,6 @@
                     <a:p>
                       <a:r>
                         <a:t>Chat 동결 유지</a:t>
-                      </a:r>
-                    </a:p>
-                  </a:txBody>
-                  <a:tcPr marL="91440" marR="91440" marT="45720" marB="45720"/>
-                </a:tc>
-              </a:tr>
-              <a:tr h="436954">
-                <a:tc>
-                  <a:txBody>
-                    <a:bodyPr/>
-                    <a:lstStyle/>
-                    <a:p>
-                      <a:r>
-                        <a:t>서버 Health</a:t>
-                      </a:r>
-                    </a:p>
-                  </a:txBody>
-                  <a:tcPr marL="91440" marR="91440" marT="45720" marB="45720"/>
-                </a:tc>
-                <a:tc>
-                  <a:txBody>
-                    <a:bodyPr/>
-                    <a:lstStyle/>
-                    <a:p>
-                      <a:r>
-                        <a:t>1</a:t>
-                      </a:r>
-                    </a:p>
-                  </a:txBody>
-                  <a:tcPr marL="91440" marR="91440" marT="45720" marB="45720"/>
-                </a:tc>
-                <a:tc>
-                  <a:txBody>
-                    <a:bodyPr/>
-                    <a:lstStyle/>
-                    <a:p>
-                      <a:r>
-                        <a:t>READY</a:t>
-                      </a:r>
-                    </a:p>
-                  </a:txBody>
-                  <a:tcPr marL="91440" marR="91440" marT="45720" marB="45720"/>
-                </a:tc>
-                <a:tc>
-                  <a:txBody>
-                    <a:bodyPr/>
-                    <a:lstStyle/>
-                    <a:p>
-                      <a:r>
-                        <a:t>OpenAI</a:t>
-                      </a:r>
-                    </a:p>
-                  </a:txBody>
-                  <a:tcPr marL="91440" marR="91440" marT="45720" marB="45720"/>
-                </a:tc>
-                <a:tc>
-                  <a:txBody>
-                    <a:bodyPr/>
-                    <a:lstStyle/>
-                    <a:p>
-                      <a:r>
-                        <a:t>DB·Vector 정상</a:t>
                       </a:r>
                     </a:p>
                   </a:txBody>
@@ -4082,537 +4533,6 @@
 </p:sld>
 </file>
 
-<file path=ppt/slides/slide7.xml><?xml version="1.0" encoding="utf-8"?>
-<p:sld xmlns:p="http://schemas.openxmlformats.org/presentationml/2006/main">
-  <p:cSld>
-    <p:spTree>
-      <p:nvGrpSpPr>
-        <p:cNvPr id="1" name=""/>
-        <p:cNvGrpSpPr/>
-        <p:nvPr/>
-      </p:nvGrpSpPr>
-      <p:grpSpPr>
-        <a:xfrm xmlns:a="http://schemas.openxmlformats.org/drawingml/2006/main"/>
-      </p:grpSpPr>
-      <p:sp>
-        <p:nvSpPr>
-          <p:cNvPr id="13" name="Slide-Number-Placeholder-3-2">
-            <a:extLst xmlns:a="http://schemas.openxmlformats.org/drawingml/2006/main">
-              <a:ext uri="{FF2B5EF4-FFF2-40B4-BE49-F238E27FC236}">
-                <a16:creationId xmlns:a16="http://schemas.microsoft.com/office/drawing/2014/main" id="{4A82E25D-29F6-4619-A022-90453D0C1420}"/>
-              </a:ext>
-            </a:extLst>
-          </p:cNvPr>
-          <p:cNvSpPr>
-            <a:spLocks xmlns:a="http://schemas.openxmlformats.org/drawingml/2006/main" noGrp="1"/>
-          </p:cNvSpPr>
-          <p:nvPr/>
-        </p:nvSpPr>
-        <p:spPr>
-          <a:xfrm xmlns:a="http://schemas.openxmlformats.org/drawingml/2006/main">
-            <a:off x="11279315" y="6279261"/>
-            <a:ext cx="518922" cy="241268"/>
-          </a:xfrm>
-          <a:prstGeom xmlns:a="http://schemas.openxmlformats.org/drawingml/2006/main" prst="rect">
-            <a:avLst/>
-          </a:prstGeom>
-        </p:spPr>
-        <p:txBody>
-          <a:bodyPr xmlns:a="http://schemas.openxmlformats.org/drawingml/2006/main" lIns="0" tIns="0" rIns="0" bIns="0" anchor="b"/>
-          <a:lstStyle xmlns:a="http://schemas.openxmlformats.org/drawingml/2006/main"/>
-          <a:p xmlns:a="http://schemas.openxmlformats.org/drawingml/2006/main">
-            <a:pPr algn="r">
-              <a:defRPr sz="1000">
-                <a:solidFill>
-                  <a:srgbClr val="000000"/>
-                </a:solidFill>
-                <a:latin typeface="Helvetica Neue"/>
-                <a:ea typeface="Helvetica Neue"/>
-                <a:cs typeface="Helvetica Neue"/>
-              </a:defRPr>
-            </a:pPr>
-            <a:r>
-              <a:t>7</a:t>
-            </a:r>
-          </a:p>
-        </p:txBody>
-      </p:sp>
-      <p:sp>
-        <p:nvSpPr>
-          <p:cNvPr id="2" name="Title-10-3">
-            <a:extLst xmlns:a="http://schemas.openxmlformats.org/drawingml/2006/main">
-              <a:ext uri="{FF2B5EF4-FFF2-40B4-BE49-F238E27FC236}">
-                <a16:creationId xmlns:a16="http://schemas.microsoft.com/office/drawing/2014/main" id="{953E66BE-ABEC-484D-B53A-F907C4DA047F}"/>
-              </a:ext>
-            </a:extLst>
-          </p:cNvPr>
-          <p:cNvSpPr>
-            <a:spLocks xmlns:a="http://schemas.openxmlformats.org/drawingml/2006/main" noGrp="1"/>
-          </p:cNvSpPr>
-          <p:nvPr/>
-        </p:nvSpPr>
-        <p:spPr>
-          <a:xfrm xmlns:a="http://schemas.openxmlformats.org/drawingml/2006/main">
-            <a:off x="393668" y="344043"/>
-            <a:ext cx="11404568" cy="1047464"/>
-          </a:xfrm>
-          <a:prstGeom xmlns:a="http://schemas.openxmlformats.org/drawingml/2006/main" prst="rect">
-            <a:avLst/>
-          </a:prstGeom>
-        </p:spPr>
-        <p:txBody>
-          <a:bodyPr xmlns:a="http://schemas.openxmlformats.org/drawingml/2006/main" lIns="0" tIns="0" rIns="0" bIns="0" anchor="t">
-            <a:normAutofit fontScale="100000"/>
-          </a:bodyPr>
-          <a:lstStyle xmlns:a="http://schemas.openxmlformats.org/drawingml/2006/main"/>
-          <a:p xmlns:a="http://schemas.openxmlformats.org/drawingml/2006/main">
-            <a:pPr algn="l">
-              <a:defRPr sz="2900">
-                <a:solidFill>
-                  <a:srgbClr val="000000"/>
-                </a:solidFill>
-                <a:latin typeface="Helvetica Neue"/>
-                <a:ea typeface="Helvetica Neue"/>
-                <a:cs typeface="Helvetica Neue"/>
-              </a:defRPr>
-            </a:pPr>
-            <a:r>
-              <a:t>배포는 백업과 보호 가드를 양쪽에 둔다</a:t>
-            </a:r>
-          </a:p>
-        </p:txBody>
-      </p:sp>
-      <p:cxnSp>
-        <p:nvCxnSpPr>
-          <p:cNvPr id="15" name="Google-Shape-2259-p159-4"/>
-          <p:cNvCxnSpPr/>
-          <p:nvPr/>
-        </p:nvCxnSpPr>
-        <p:spPr>
-          <a:xfrm xmlns:a="http://schemas.openxmlformats.org/drawingml/2006/main">
-            <a:off x="337757" y="3373755"/>
-            <a:ext cx="12245435" cy="286"/>
-          </a:xfrm>
-          <a:prstGeom xmlns:a="http://schemas.openxmlformats.org/drawingml/2006/main" prst="straightConnector1">
-            <a:avLst/>
-          </a:prstGeom>
-          <a:ln xmlns:a="http://schemas.openxmlformats.org/drawingml/2006/main" w="9525">
-            <a:solidFill>
-              <a:srgbClr val="000000"/>
-            </a:solidFill>
-            <a:prstDash val="solid"/>
-          </a:ln>
-        </p:spPr>
-      </p:cxnSp>
-      <p:sp>
-        <p:nvSpPr>
-          <p:cNvPr id="4" name="Google-Shape-2260-p159-5">
-            <a:extLst xmlns:a="http://schemas.openxmlformats.org/drawingml/2006/main">
-              <a:ext uri="{FF2B5EF4-FFF2-40B4-BE49-F238E27FC236}">
-                <a16:creationId xmlns:a16="http://schemas.microsoft.com/office/drawing/2014/main" id="{49734D4A-C923-49C9-8006-DDBE014A580A}"/>
-              </a:ext>
-            </a:extLst>
-          </p:cNvPr>
-          <p:cNvSpPr>
-            <a:spLocks xmlns:a="http://schemas.openxmlformats.org/drawingml/2006/main" noGrp="1"/>
-          </p:cNvSpPr>
-          <p:nvPr/>
-        </p:nvSpPr>
-        <p:spPr>
-          <a:xfrm xmlns:a="http://schemas.openxmlformats.org/drawingml/2006/main">
-            <a:off x="337757" y="3320225"/>
-            <a:ext cx="107061" cy="107061"/>
-          </a:xfrm>
-          <a:prstGeom xmlns:a="http://schemas.openxmlformats.org/drawingml/2006/main" prst="ellipse">
-            <a:avLst/>
-          </a:prstGeom>
-          <a:solidFill xmlns:a="http://schemas.openxmlformats.org/drawingml/2006/main">
-            <a:srgbClr val="000000"/>
-          </a:solidFill>
-        </p:spPr>
-      </p:sp>
-      <p:sp>
-        <p:nvSpPr>
-          <p:cNvPr id="5" name="Google-Shape-2261-p159-6">
-            <a:extLst xmlns:a="http://schemas.openxmlformats.org/drawingml/2006/main">
-              <a:ext uri="{FF2B5EF4-FFF2-40B4-BE49-F238E27FC236}">
-                <a16:creationId xmlns:a16="http://schemas.microsoft.com/office/drawing/2014/main" id="{BF62072E-D352-4703-B45E-58BADA60AEE5}"/>
-              </a:ext>
-            </a:extLst>
-          </p:cNvPr>
-          <p:cNvSpPr>
-            <a:spLocks xmlns:a="http://schemas.openxmlformats.org/drawingml/2006/main" noGrp="1"/>
-          </p:cNvSpPr>
-          <p:nvPr/>
-        </p:nvSpPr>
-        <p:spPr>
-          <a:xfrm xmlns:a="http://schemas.openxmlformats.org/drawingml/2006/main">
-            <a:off x="4251770" y="3320225"/>
-            <a:ext cx="107061" cy="107061"/>
-          </a:xfrm>
-          <a:prstGeom xmlns:a="http://schemas.openxmlformats.org/drawingml/2006/main" prst="ellipse">
-            <a:avLst/>
-          </a:prstGeom>
-          <a:solidFill xmlns:a="http://schemas.openxmlformats.org/drawingml/2006/main">
-            <a:srgbClr val="000000"/>
-          </a:solidFill>
-        </p:spPr>
-      </p:sp>
-      <p:sp>
-        <p:nvSpPr>
-          <p:cNvPr id="6" name="Google-Shape-2262-p159-7">
-            <a:extLst xmlns:a="http://schemas.openxmlformats.org/drawingml/2006/main">
-              <a:ext uri="{FF2B5EF4-FFF2-40B4-BE49-F238E27FC236}">
-                <a16:creationId xmlns:a16="http://schemas.microsoft.com/office/drawing/2014/main" id="{BF80B9D3-A7CE-4481-9A27-A5D6DCC5B36D}"/>
-              </a:ext>
-            </a:extLst>
-          </p:cNvPr>
-          <p:cNvSpPr>
-            <a:spLocks xmlns:a="http://schemas.openxmlformats.org/drawingml/2006/main" noGrp="1"/>
-          </p:cNvSpPr>
-          <p:nvPr/>
-        </p:nvSpPr>
-        <p:spPr>
-          <a:xfrm xmlns:a="http://schemas.openxmlformats.org/drawingml/2006/main">
-            <a:off x="8176070" y="3320225"/>
-            <a:ext cx="107061" cy="107061"/>
-          </a:xfrm>
-          <a:prstGeom xmlns:a="http://schemas.openxmlformats.org/drawingml/2006/main" prst="ellipse">
-            <a:avLst/>
-          </a:prstGeom>
-          <a:solidFill xmlns:a="http://schemas.openxmlformats.org/drawingml/2006/main">
-            <a:srgbClr val="000000"/>
-          </a:solidFill>
-        </p:spPr>
-      </p:sp>
-      <p:sp>
-        <p:nvSpPr>
-          <p:cNvPr id="7" name="Content-Placeholder-15-8">
-            <a:extLst xmlns:a="http://schemas.openxmlformats.org/drawingml/2006/main">
-              <a:ext uri="{FF2B5EF4-FFF2-40B4-BE49-F238E27FC236}">
-                <a16:creationId xmlns:a16="http://schemas.microsoft.com/office/drawing/2014/main" id="{D5AF2C28-214E-47B7-B408-38E369BBA53F}"/>
-              </a:ext>
-            </a:extLst>
-          </p:cNvPr>
-          <p:cNvSpPr>
-            <a:spLocks xmlns:a="http://schemas.openxmlformats.org/drawingml/2006/main" noGrp="1"/>
-          </p:cNvSpPr>
-          <p:nvPr/>
-        </p:nvSpPr>
-        <p:spPr>
-          <a:xfrm xmlns:a="http://schemas.openxmlformats.org/drawingml/2006/main">
-            <a:off x="393668" y="2843308"/>
-            <a:ext cx="1612868" cy="262414"/>
-          </a:xfrm>
-          <a:prstGeom xmlns:a="http://schemas.openxmlformats.org/drawingml/2006/main" prst="rect">
-            <a:avLst/>
-          </a:prstGeom>
-        </p:spPr>
-        <p:txBody>
-          <a:bodyPr xmlns:a="http://schemas.openxmlformats.org/drawingml/2006/main" lIns="0" tIns="0" rIns="0" bIns="0">
-            <a:noAutofit/>
-          </a:bodyPr>
-          <a:lstStyle xmlns:a="http://schemas.openxmlformats.org/drawingml/2006/main"/>
-          <a:p xmlns:a="http://schemas.openxmlformats.org/drawingml/2006/main">
-            <a:pPr algn="l">
-              <a:defRPr sz="1600">
-                <a:solidFill>
-                  <a:srgbClr val="000000"/>
-                </a:solidFill>
-                <a:latin typeface="Helvetica Neue"/>
-                <a:ea typeface="Helvetica Neue"/>
-                <a:cs typeface="Helvetica Neue"/>
-              </a:defRPr>
-            </a:pPr>
-            <a:r>
-              <a:t>배포 전</a:t>
-            </a:r>
-          </a:p>
-        </p:txBody>
-      </p:sp>
-      <p:sp>
-        <p:nvSpPr>
-          <p:cNvPr id="8" name="Content-Placeholder-15-9">
-            <a:extLst xmlns:a="http://schemas.openxmlformats.org/drawingml/2006/main">
-              <a:ext uri="{FF2B5EF4-FFF2-40B4-BE49-F238E27FC236}">
-                <a16:creationId xmlns:a16="http://schemas.microsoft.com/office/drawing/2014/main" id="{64911C11-0520-4455-A2F3-7353F389E02F}"/>
-              </a:ext>
-            </a:extLst>
-          </p:cNvPr>
-          <p:cNvSpPr>
-            <a:spLocks xmlns:a="http://schemas.openxmlformats.org/drawingml/2006/main" noGrp="1"/>
-          </p:cNvSpPr>
-          <p:nvPr/>
-        </p:nvSpPr>
-        <p:spPr>
-          <a:xfrm xmlns:a="http://schemas.openxmlformats.org/drawingml/2006/main">
-            <a:off x="4294156" y="2843308"/>
-            <a:ext cx="1612868" cy="262414"/>
-          </a:xfrm>
-          <a:prstGeom xmlns:a="http://schemas.openxmlformats.org/drawingml/2006/main" prst="rect">
-            <a:avLst/>
-          </a:prstGeom>
-        </p:spPr>
-        <p:txBody>
-          <a:bodyPr xmlns:a="http://schemas.openxmlformats.org/drawingml/2006/main" lIns="0" tIns="0" rIns="0" bIns="0">
-            <a:noAutofit/>
-          </a:bodyPr>
-          <a:lstStyle xmlns:a="http://schemas.openxmlformats.org/drawingml/2006/main"/>
-          <a:p xmlns:a="http://schemas.openxmlformats.org/drawingml/2006/main">
-            <a:pPr algn="l">
-              <a:defRPr sz="1600">
-                <a:solidFill>
-                  <a:srgbClr val="000000"/>
-                </a:solidFill>
-                <a:latin typeface="Helvetica Neue"/>
-                <a:ea typeface="Helvetica Neue"/>
-                <a:cs typeface="Helvetica Neue"/>
-              </a:defRPr>
-            </a:pPr>
-            <a:r>
-              <a:t>AI·Flow</a:t>
-            </a:r>
-          </a:p>
-        </p:txBody>
-      </p:sp>
-      <p:sp>
-        <p:nvSpPr>
-          <p:cNvPr id="9" name="Content-Placeholder-15-10">
-            <a:extLst xmlns:a="http://schemas.openxmlformats.org/drawingml/2006/main">
-              <a:ext uri="{FF2B5EF4-FFF2-40B4-BE49-F238E27FC236}">
-                <a16:creationId xmlns:a16="http://schemas.microsoft.com/office/drawing/2014/main" id="{6533F0C6-0819-41B2-BDAA-98D9A32E929D}"/>
-              </a:ext>
-            </a:extLst>
-          </p:cNvPr>
-          <p:cNvSpPr>
-            <a:spLocks xmlns:a="http://schemas.openxmlformats.org/drawingml/2006/main" noGrp="1"/>
-          </p:cNvSpPr>
-          <p:nvPr/>
-        </p:nvSpPr>
-        <p:spPr>
-          <a:xfrm xmlns:a="http://schemas.openxmlformats.org/drawingml/2006/main">
-            <a:off x="8223218" y="2843308"/>
-            <a:ext cx="1612868" cy="262414"/>
-          </a:xfrm>
-          <a:prstGeom xmlns:a="http://schemas.openxmlformats.org/drawingml/2006/main" prst="rect">
-            <a:avLst/>
-          </a:prstGeom>
-        </p:spPr>
-        <p:txBody>
-          <a:bodyPr xmlns:a="http://schemas.openxmlformats.org/drawingml/2006/main" lIns="0" tIns="0" rIns="0" bIns="0">
-            <a:noAutofit/>
-          </a:bodyPr>
-          <a:lstStyle xmlns:a="http://schemas.openxmlformats.org/drawingml/2006/main"/>
-          <a:p xmlns:a="http://schemas.openxmlformats.org/drawingml/2006/main">
-            <a:pPr algn="l">
-              <a:defRPr sz="1600">
-                <a:solidFill>
-                  <a:srgbClr val="000000"/>
-                </a:solidFill>
-                <a:latin typeface="Helvetica Neue"/>
-                <a:ea typeface="Helvetica Neue"/>
-                <a:cs typeface="Helvetica Neue"/>
-              </a:defRPr>
-            </a:pPr>
-            <a:r>
-              <a:t>배포 후</a:t>
-            </a:r>
-          </a:p>
-        </p:txBody>
-      </p:sp>
-      <p:sp>
-        <p:nvSpPr>
-          <p:cNvPr id="10" name="Text-Placeholder-16-11">
-            <a:extLst xmlns:a="http://schemas.openxmlformats.org/drawingml/2006/main">
-              <a:ext uri="{FF2B5EF4-FFF2-40B4-BE49-F238E27FC236}">
-                <a16:creationId xmlns:a16="http://schemas.microsoft.com/office/drawing/2014/main" id="{9E879315-A04B-46CF-A1B8-AD85CA5A46E5}"/>
-              </a:ext>
-            </a:extLst>
-          </p:cNvPr>
-          <p:cNvSpPr>
-            <a:spLocks xmlns:a="http://schemas.openxmlformats.org/drawingml/2006/main" noGrp="1"/>
-          </p:cNvSpPr>
-          <p:nvPr/>
-        </p:nvSpPr>
-        <p:spPr>
-          <a:xfrm xmlns:a="http://schemas.openxmlformats.org/drawingml/2006/main">
-            <a:off x="4317111" y="3822668"/>
-            <a:ext cx="3156109" cy="1586294"/>
-          </a:xfrm>
-          <a:prstGeom xmlns:a="http://schemas.openxmlformats.org/drawingml/2006/main" prst="rect">
-            <a:avLst/>
-          </a:prstGeom>
-        </p:spPr>
-        <p:txBody>
-          <a:bodyPr xmlns:a="http://schemas.openxmlformats.org/drawingml/2006/main" lIns="0" tIns="0" rIns="0" bIns="0">
-            <a:noAutofit/>
-          </a:bodyPr>
-          <a:lstStyle xmlns:a="http://schemas.openxmlformats.org/drawingml/2006/main"/>
-          <a:p xmlns:a="http://schemas.openxmlformats.org/drawingml/2006/main">
-            <a:pPr algn="l">
-              <a:defRPr sz="2400">
-                <a:solidFill>
-                  <a:srgbClr val="000000"/>
-                </a:solidFill>
-                <a:latin typeface="Helvetica Neue"/>
-                <a:ea typeface="Helvetica Neue"/>
-                <a:cs typeface="Helvetica Neue"/>
-              </a:defRPr>
-            </a:pPr>
-            <a:r>
-              <a:t>0.7.0</a:t>
-            </a:r>
-          </a:p>
-          <a:p xmlns:a="http://schemas.openxmlformats.org/drawingml/2006/main">
-            <a:pPr algn="l">
-              <a:defRPr sz="2400">
-                <a:solidFill>
-                  <a:srgbClr val="000000"/>
-                </a:solidFill>
-                <a:latin typeface="Helvetica Neue"/>
-                <a:ea typeface="Helvetica Neue"/>
-                <a:cs typeface="Helvetica Neue"/>
-              </a:defRPr>
-            </a:pPr>
-            <a:r>
-              <a:t>Gateway만 교체
-Assist Flow 2개 추가</a:t>
-            </a:r>
-          </a:p>
-        </p:txBody>
-      </p:sp>
-      <p:sp>
-        <p:nvSpPr>
-          <p:cNvPr id="11" name="Text-Placeholder-16-12">
-            <a:extLst xmlns:a="http://schemas.openxmlformats.org/drawingml/2006/main">
-              <a:ext uri="{FF2B5EF4-FFF2-40B4-BE49-F238E27FC236}">
-                <a16:creationId xmlns:a16="http://schemas.microsoft.com/office/drawing/2014/main" id="{667A8A4A-95FE-4FE5-9351-4C3E4EB6B568}"/>
-              </a:ext>
-            </a:extLst>
-          </p:cNvPr>
-          <p:cNvSpPr>
-            <a:spLocks xmlns:a="http://schemas.openxmlformats.org/drawingml/2006/main" noGrp="1"/>
-          </p:cNvSpPr>
-          <p:nvPr/>
-        </p:nvSpPr>
-        <p:spPr>
-          <a:xfrm xmlns:a="http://schemas.openxmlformats.org/drawingml/2006/main">
-            <a:off x="399859" y="3822668"/>
-            <a:ext cx="3156109" cy="1586294"/>
-          </a:xfrm>
-          <a:prstGeom xmlns:a="http://schemas.openxmlformats.org/drawingml/2006/main" prst="rect">
-            <a:avLst/>
-          </a:prstGeom>
-        </p:spPr>
-        <p:txBody>
-          <a:bodyPr xmlns:a="http://schemas.openxmlformats.org/drawingml/2006/main" lIns="0" tIns="0" rIns="0" bIns="0">
-            <a:noAutofit/>
-          </a:bodyPr>
-          <a:lstStyle xmlns:a="http://schemas.openxmlformats.org/drawingml/2006/main"/>
-          <a:p xmlns:a="http://schemas.openxmlformats.org/drawingml/2006/main">
-            <a:pPr algn="l">
-              <a:defRPr sz="2400">
-                <a:solidFill>
-                  <a:srgbClr val="000000"/>
-                </a:solidFill>
-                <a:latin typeface="Helvetica Neue"/>
-                <a:ea typeface="Helvetica Neue"/>
-                <a:cs typeface="Helvetica Neue"/>
-              </a:defRPr>
-            </a:pPr>
-            <a:r>
-              <a:t>Backup</a:t>
-            </a:r>
-          </a:p>
-          <a:p xmlns:a="http://schemas.openxmlformats.org/drawingml/2006/main">
-            <a:pPr algn="l">
-              <a:defRPr sz="2400">
-                <a:solidFill>
-                  <a:srgbClr val="000000"/>
-                </a:solidFill>
-                <a:latin typeface="Helvetica Neue"/>
-                <a:ea typeface="Helvetica Neue"/>
-                <a:cs typeface="Helvetica Neue"/>
-              </a:defRPr>
-            </a:pPr>
-            <a:r>
-              <a:t>DB·소스·Image ID
-보호 가드 PASS</a:t>
-            </a:r>
-          </a:p>
-        </p:txBody>
-      </p:sp>
-      <p:sp>
-        <p:nvSpPr>
-          <p:cNvPr id="12" name="Text-Placeholder-16-13">
-            <a:extLst xmlns:a="http://schemas.openxmlformats.org/drawingml/2006/main">
-              <a:ext uri="{FF2B5EF4-FFF2-40B4-BE49-F238E27FC236}">
-                <a16:creationId xmlns:a16="http://schemas.microsoft.com/office/drawing/2014/main" id="{FFE62EA7-8975-4423-9CF4-557C984FCCE3}"/>
-              </a:ext>
-            </a:extLst>
-          </p:cNvPr>
-          <p:cNvSpPr>
-            <a:spLocks xmlns:a="http://schemas.openxmlformats.org/drawingml/2006/main" noGrp="1"/>
-          </p:cNvSpPr>
-          <p:nvPr/>
-        </p:nvSpPr>
-        <p:spPr>
-          <a:xfrm xmlns:a="http://schemas.openxmlformats.org/drawingml/2006/main">
-            <a:off x="8177879" y="3822668"/>
-            <a:ext cx="3156109" cy="1586294"/>
-          </a:xfrm>
-          <a:prstGeom xmlns:a="http://schemas.openxmlformats.org/drawingml/2006/main" prst="rect">
-            <a:avLst/>
-          </a:prstGeom>
-        </p:spPr>
-        <p:txBody>
-          <a:bodyPr xmlns:a="http://schemas.openxmlformats.org/drawingml/2006/main" lIns="0" tIns="0" rIns="0" bIns="0">
-            <a:noAutofit/>
-          </a:bodyPr>
-          <a:lstStyle xmlns:a="http://schemas.openxmlformats.org/drawingml/2006/main"/>
-          <a:p xmlns:a="http://schemas.openxmlformats.org/drawingml/2006/main">
-            <a:pPr algn="l">
-              <a:defRPr sz="2400">
-                <a:solidFill>
-                  <a:srgbClr val="000000"/>
-                </a:solidFill>
-                <a:latin typeface="Helvetica Neue"/>
-                <a:ea typeface="Helvetica Neue"/>
-                <a:cs typeface="Helvetica Neue"/>
-              </a:defRPr>
-            </a:pPr>
-            <a:r>
-              <a:t>Verify</a:t>
-            </a:r>
-          </a:p>
-          <a:p xmlns:a="http://schemas.openxmlformats.org/drawingml/2006/main">
-            <a:pPr algn="l">
-              <a:defRPr sz="2400">
-                <a:solidFill>
-                  <a:srgbClr val="000000"/>
-                </a:solidFill>
-                <a:latin typeface="Helvetica Neue"/>
-                <a:ea typeface="Helvetica Neue"/>
-                <a:cs typeface="Helvetica Neue"/>
-              </a:defRPr>
-            </a:pPr>
-            <a:r>
-              <a:t>Health READY
-Chat 동결 가드 PASS</a:t>
-            </a:r>
-          </a:p>
-        </p:txBody>
-      </p:sp>
-    </p:spTree>
-    <p:extLst>
-      <p:ext uri="{BB962C8B-B14F-4D97-AF65-F5344CB8AC3E}">
-        <p14:creationId xmlns:p14="http://schemas.microsoft.com/office/powerpoint/2010/main" val="1953526460"/>
-      </p:ext>
-    </p:extLst>
-  </p:cSld>
-</p:sld>
-</file>
-
 <file path=ppt/slides/slide8.xml><?xml version="1.0" encoding="utf-8"?>
 <p:sld xmlns:p="http://schemas.openxmlformats.org/presentationml/2006/main">
   <p:cSld>
@@ -4627,6 +4547,554 @@
       </p:grpSpPr>
       <p:sp>
         <p:nvSpPr>
+          <p:cNvPr id="13" name="Slide-Number-Placeholder-3-2">
+            <a:extLst xmlns:a="http://schemas.openxmlformats.org/drawingml/2006/main">
+              <a:ext uri="{FF2B5EF4-FFF2-40B4-BE49-F238E27FC236}">
+                <a16:creationId xmlns:a16="http://schemas.microsoft.com/office/drawing/2014/main" id="{4A82E25D-29F6-4619-A022-90453D0C1420}"/>
+              </a:ext>
+            </a:extLst>
+          </p:cNvPr>
+          <p:cNvSpPr>
+            <a:spLocks xmlns:a="http://schemas.openxmlformats.org/drawingml/2006/main" noGrp="1"/>
+          </p:cNvSpPr>
+          <p:nvPr/>
+        </p:nvSpPr>
+        <p:spPr>
+          <a:xfrm xmlns:a="http://schemas.openxmlformats.org/drawingml/2006/main">
+            <a:off x="11279315" y="6279261"/>
+            <a:ext cx="518922" cy="241268"/>
+          </a:xfrm>
+          <a:prstGeom xmlns:a="http://schemas.openxmlformats.org/drawingml/2006/main" prst="rect">
+            <a:avLst/>
+          </a:prstGeom>
+        </p:spPr>
+        <p:txBody>
+          <a:bodyPr xmlns:a="http://schemas.openxmlformats.org/drawingml/2006/main" lIns="0" tIns="0" rIns="0" bIns="0" anchor="b"/>
+          <a:lstStyle xmlns:a="http://schemas.openxmlformats.org/drawingml/2006/main"/>
+          <a:p xmlns:a="http://schemas.openxmlformats.org/drawingml/2006/main">
+            <a:pPr algn="r">
+              <a:buNone/>
+              <a:defRPr sz="1000">
+                <a:solidFill>
+                  <a:srgbClr val="000000"/>
+                </a:solidFill>
+                <a:latin typeface="Helvetica Neue"/>
+                <a:ea typeface="Helvetica Neue"/>
+                <a:cs typeface="Helvetica Neue"/>
+              </a:defRPr>
+            </a:pPr>
+            <a:r>
+              <a:t>8</a:t>
+            </a:r>
+          </a:p>
+        </p:txBody>
+      </p:sp>
+      <p:sp>
+        <p:nvSpPr>
+          <p:cNvPr id="2" name="Title-10-3">
+            <a:extLst xmlns:a="http://schemas.openxmlformats.org/drawingml/2006/main">
+              <a:ext uri="{FF2B5EF4-FFF2-40B4-BE49-F238E27FC236}">
+                <a16:creationId xmlns:a16="http://schemas.microsoft.com/office/drawing/2014/main" id="{953E66BE-ABEC-484D-B53A-F907C4DA047F}"/>
+              </a:ext>
+            </a:extLst>
+          </p:cNvPr>
+          <p:cNvSpPr>
+            <a:spLocks xmlns:a="http://schemas.openxmlformats.org/drawingml/2006/main" noGrp="1"/>
+          </p:cNvSpPr>
+          <p:nvPr/>
+        </p:nvSpPr>
+        <p:spPr>
+          <a:xfrm xmlns:a="http://schemas.openxmlformats.org/drawingml/2006/main">
+            <a:off x="393668" y="344043"/>
+            <a:ext cx="11404568" cy="1047464"/>
+          </a:xfrm>
+          <a:prstGeom xmlns:a="http://schemas.openxmlformats.org/drawingml/2006/main" prst="rect">
+            <a:avLst/>
+          </a:prstGeom>
+        </p:spPr>
+        <p:txBody>
+          <a:bodyPr xmlns:a="http://schemas.openxmlformats.org/drawingml/2006/main" lIns="0" tIns="0" rIns="0" bIns="0" anchor="t">
+            <a:normAutofit fontScale="100000"/>
+          </a:bodyPr>
+          <a:lstStyle xmlns:a="http://schemas.openxmlformats.org/drawingml/2006/main"/>
+          <a:p xmlns:a="http://schemas.openxmlformats.org/drawingml/2006/main">
+            <a:pPr algn="l">
+              <a:buNone/>
+              <a:defRPr sz="2900">
+                <a:solidFill>
+                  <a:srgbClr val="000000"/>
+                </a:solidFill>
+                <a:latin typeface="Helvetica Neue"/>
+                <a:ea typeface="Helvetica Neue"/>
+                <a:cs typeface="Helvetica Neue"/>
+              </a:defRPr>
+            </a:pPr>
+            <a:r>
+              <a:t>배포는 백업과 보호 가드를 양쪽에 둔다</a:t>
+            </a:r>
+          </a:p>
+        </p:txBody>
+      </p:sp>
+      <p:cxnSp>
+        <p:nvCxnSpPr>
+          <p:cNvPr id="21" name="Google-Shape-2259-p159-4"/>
+          <p:cNvCxnSpPr/>
+          <p:nvPr/>
+        </p:nvCxnSpPr>
+        <p:spPr>
+          <a:xfrm xmlns:a="http://schemas.openxmlformats.org/drawingml/2006/main">
+            <a:off x="337757" y="3373755"/>
+            <a:ext cx="12245435" cy="286"/>
+          </a:xfrm>
+          <a:prstGeom xmlns:a="http://schemas.openxmlformats.org/drawingml/2006/main" prst="straightConnector1">
+            <a:avLst/>
+          </a:prstGeom>
+          <a:ln xmlns:a="http://schemas.openxmlformats.org/drawingml/2006/main" w="9525">
+            <a:solidFill>
+              <a:srgbClr val="000000"/>
+            </a:solidFill>
+            <a:prstDash val="solid"/>
+          </a:ln>
+        </p:spPr>
+      </p:cxnSp>
+      <p:sp>
+        <p:nvSpPr>
+          <p:cNvPr id="4" name="Google-Shape-2260-p159-5">
+            <a:extLst xmlns:a="http://schemas.openxmlformats.org/drawingml/2006/main">
+              <a:ext uri="{FF2B5EF4-FFF2-40B4-BE49-F238E27FC236}">
+                <a16:creationId xmlns:a16="http://schemas.microsoft.com/office/drawing/2014/main" id="{49734D4A-C923-49C9-8006-DDBE014A580A}"/>
+              </a:ext>
+            </a:extLst>
+          </p:cNvPr>
+          <p:cNvSpPr>
+            <a:spLocks xmlns:a="http://schemas.openxmlformats.org/drawingml/2006/main" noGrp="1"/>
+          </p:cNvSpPr>
+          <p:nvPr/>
+        </p:nvSpPr>
+        <p:spPr>
+          <a:xfrm xmlns:a="http://schemas.openxmlformats.org/drawingml/2006/main">
+            <a:off x="337757" y="3320225"/>
+            <a:ext cx="107061" cy="107061"/>
+          </a:xfrm>
+          <a:prstGeom xmlns:a="http://schemas.openxmlformats.org/drawingml/2006/main" prst="ellipse">
+            <a:avLst/>
+          </a:prstGeom>
+          <a:solidFill xmlns:a="http://schemas.openxmlformats.org/drawingml/2006/main">
+            <a:srgbClr val="000000"/>
+          </a:solidFill>
+        </p:spPr>
+      </p:sp>
+      <p:sp>
+        <p:nvSpPr>
+          <p:cNvPr id="5" name="Google-Shape-2261-p159-6">
+            <a:extLst xmlns:a="http://schemas.openxmlformats.org/drawingml/2006/main">
+              <a:ext uri="{FF2B5EF4-FFF2-40B4-BE49-F238E27FC236}">
+                <a16:creationId xmlns:a16="http://schemas.microsoft.com/office/drawing/2014/main" id="{BF62072E-D352-4703-B45E-58BADA60AEE5}"/>
+              </a:ext>
+            </a:extLst>
+          </p:cNvPr>
+          <p:cNvSpPr>
+            <a:spLocks xmlns:a="http://schemas.openxmlformats.org/drawingml/2006/main" noGrp="1"/>
+          </p:cNvSpPr>
+          <p:nvPr/>
+        </p:nvSpPr>
+        <p:spPr>
+          <a:xfrm xmlns:a="http://schemas.openxmlformats.org/drawingml/2006/main">
+            <a:off x="4251770" y="3320225"/>
+            <a:ext cx="107061" cy="107061"/>
+          </a:xfrm>
+          <a:prstGeom xmlns:a="http://schemas.openxmlformats.org/drawingml/2006/main" prst="ellipse">
+            <a:avLst/>
+          </a:prstGeom>
+          <a:solidFill xmlns:a="http://schemas.openxmlformats.org/drawingml/2006/main">
+            <a:srgbClr val="000000"/>
+          </a:solidFill>
+        </p:spPr>
+      </p:sp>
+      <p:sp>
+        <p:nvSpPr>
+          <p:cNvPr id="6" name="Google-Shape-2262-p159-7">
+            <a:extLst xmlns:a="http://schemas.openxmlformats.org/drawingml/2006/main">
+              <a:ext uri="{FF2B5EF4-FFF2-40B4-BE49-F238E27FC236}">
+                <a16:creationId xmlns:a16="http://schemas.microsoft.com/office/drawing/2014/main" id="{BF80B9D3-A7CE-4481-9A27-A5D6DCC5B36D}"/>
+              </a:ext>
+            </a:extLst>
+          </p:cNvPr>
+          <p:cNvSpPr>
+            <a:spLocks xmlns:a="http://schemas.openxmlformats.org/drawingml/2006/main" noGrp="1"/>
+          </p:cNvSpPr>
+          <p:nvPr/>
+        </p:nvSpPr>
+        <p:spPr>
+          <a:xfrm xmlns:a="http://schemas.openxmlformats.org/drawingml/2006/main">
+            <a:off x="8176070" y="3320225"/>
+            <a:ext cx="107061" cy="107061"/>
+          </a:xfrm>
+          <a:prstGeom xmlns:a="http://schemas.openxmlformats.org/drawingml/2006/main" prst="ellipse">
+            <a:avLst/>
+          </a:prstGeom>
+          <a:solidFill xmlns:a="http://schemas.openxmlformats.org/drawingml/2006/main">
+            <a:srgbClr val="000000"/>
+          </a:solidFill>
+        </p:spPr>
+      </p:sp>
+      <p:sp>
+        <p:nvSpPr>
+          <p:cNvPr id="7" name="Content-Placeholder-15-8">
+            <a:extLst xmlns:a="http://schemas.openxmlformats.org/drawingml/2006/main">
+              <a:ext uri="{FF2B5EF4-FFF2-40B4-BE49-F238E27FC236}">
+                <a16:creationId xmlns:a16="http://schemas.microsoft.com/office/drawing/2014/main" id="{D5AF2C28-214E-47B7-B408-38E369BBA53F}"/>
+              </a:ext>
+            </a:extLst>
+          </p:cNvPr>
+          <p:cNvSpPr>
+            <a:spLocks xmlns:a="http://schemas.openxmlformats.org/drawingml/2006/main" noGrp="1"/>
+          </p:cNvSpPr>
+          <p:nvPr/>
+        </p:nvSpPr>
+        <p:spPr>
+          <a:xfrm xmlns:a="http://schemas.openxmlformats.org/drawingml/2006/main">
+            <a:off x="393668" y="2843308"/>
+            <a:ext cx="1612868" cy="262414"/>
+          </a:xfrm>
+          <a:prstGeom xmlns:a="http://schemas.openxmlformats.org/drawingml/2006/main" prst="rect">
+            <a:avLst/>
+          </a:prstGeom>
+        </p:spPr>
+        <p:txBody>
+          <a:bodyPr xmlns:a="http://schemas.openxmlformats.org/drawingml/2006/main" lIns="0" tIns="0" rIns="0" bIns="0">
+            <a:noAutofit/>
+          </a:bodyPr>
+          <a:lstStyle xmlns:a="http://schemas.openxmlformats.org/drawingml/2006/main"/>
+          <a:p xmlns:a="http://schemas.openxmlformats.org/drawingml/2006/main">
+            <a:pPr algn="l">
+              <a:buNone/>
+              <a:defRPr sz="1600">
+                <a:solidFill>
+                  <a:srgbClr val="000000"/>
+                </a:solidFill>
+                <a:latin typeface="Helvetica Neue"/>
+                <a:ea typeface="Helvetica Neue"/>
+                <a:cs typeface="Helvetica Neue"/>
+              </a:defRPr>
+            </a:pPr>
+            <a:r>
+              <a:t>배포 전</a:t>
+            </a:r>
+          </a:p>
+        </p:txBody>
+      </p:sp>
+      <p:sp>
+        <p:nvSpPr>
+          <p:cNvPr id="8" name="Content-Placeholder-15-9">
+            <a:extLst xmlns:a="http://schemas.openxmlformats.org/drawingml/2006/main">
+              <a:ext uri="{FF2B5EF4-FFF2-40B4-BE49-F238E27FC236}">
+                <a16:creationId xmlns:a16="http://schemas.microsoft.com/office/drawing/2014/main" id="{64911C11-0520-4455-A2F3-7353F389E02F}"/>
+              </a:ext>
+            </a:extLst>
+          </p:cNvPr>
+          <p:cNvSpPr>
+            <a:spLocks xmlns:a="http://schemas.openxmlformats.org/drawingml/2006/main" noGrp="1"/>
+          </p:cNvSpPr>
+          <p:nvPr/>
+        </p:nvSpPr>
+        <p:spPr>
+          <a:xfrm xmlns:a="http://schemas.openxmlformats.org/drawingml/2006/main">
+            <a:off x="4294156" y="2843308"/>
+            <a:ext cx="1612868" cy="262414"/>
+          </a:xfrm>
+          <a:prstGeom xmlns:a="http://schemas.openxmlformats.org/drawingml/2006/main" prst="rect">
+            <a:avLst/>
+          </a:prstGeom>
+        </p:spPr>
+        <p:txBody>
+          <a:bodyPr xmlns:a="http://schemas.openxmlformats.org/drawingml/2006/main" lIns="0" tIns="0" rIns="0" bIns="0">
+            <a:noAutofit/>
+          </a:bodyPr>
+          <a:lstStyle xmlns:a="http://schemas.openxmlformats.org/drawingml/2006/main"/>
+          <a:p xmlns:a="http://schemas.openxmlformats.org/drawingml/2006/main">
+            <a:pPr algn="l">
+              <a:buNone/>
+              <a:defRPr sz="1600">
+                <a:solidFill>
+                  <a:srgbClr val="000000"/>
+                </a:solidFill>
+                <a:latin typeface="Helvetica Neue"/>
+                <a:ea typeface="Helvetica Neue"/>
+                <a:cs typeface="Helvetica Neue"/>
+              </a:defRPr>
+            </a:pPr>
+            <a:r>
+              <a:t>AI·Flow</a:t>
+            </a:r>
+          </a:p>
+        </p:txBody>
+      </p:sp>
+      <p:sp>
+        <p:nvSpPr>
+          <p:cNvPr id="9" name="Content-Placeholder-15-10">
+            <a:extLst xmlns:a="http://schemas.openxmlformats.org/drawingml/2006/main">
+              <a:ext uri="{FF2B5EF4-FFF2-40B4-BE49-F238E27FC236}">
+                <a16:creationId xmlns:a16="http://schemas.microsoft.com/office/drawing/2014/main" id="{6533F0C6-0819-41B2-BDAA-98D9A32E929D}"/>
+              </a:ext>
+            </a:extLst>
+          </p:cNvPr>
+          <p:cNvSpPr>
+            <a:spLocks xmlns:a="http://schemas.openxmlformats.org/drawingml/2006/main" noGrp="1"/>
+          </p:cNvSpPr>
+          <p:nvPr/>
+        </p:nvSpPr>
+        <p:spPr>
+          <a:xfrm xmlns:a="http://schemas.openxmlformats.org/drawingml/2006/main">
+            <a:off x="8223218" y="2843308"/>
+            <a:ext cx="1612868" cy="262414"/>
+          </a:xfrm>
+          <a:prstGeom xmlns:a="http://schemas.openxmlformats.org/drawingml/2006/main" prst="rect">
+            <a:avLst/>
+          </a:prstGeom>
+        </p:spPr>
+        <p:txBody>
+          <a:bodyPr xmlns:a="http://schemas.openxmlformats.org/drawingml/2006/main" lIns="0" tIns="0" rIns="0" bIns="0">
+            <a:noAutofit/>
+          </a:bodyPr>
+          <a:lstStyle xmlns:a="http://schemas.openxmlformats.org/drawingml/2006/main"/>
+          <a:p xmlns:a="http://schemas.openxmlformats.org/drawingml/2006/main">
+            <a:pPr algn="l">
+              <a:buNone/>
+              <a:defRPr sz="1600">
+                <a:solidFill>
+                  <a:srgbClr val="000000"/>
+                </a:solidFill>
+                <a:latin typeface="Helvetica Neue"/>
+                <a:ea typeface="Helvetica Neue"/>
+                <a:cs typeface="Helvetica Neue"/>
+              </a:defRPr>
+            </a:pPr>
+            <a:r>
+              <a:t>배포 후</a:t>
+            </a:r>
+          </a:p>
+        </p:txBody>
+      </p:sp>
+      <p:sp>
+        <p:nvSpPr>
+          <p:cNvPr id="10" name="Text-Placeholder-16-11">
+            <a:extLst xmlns:a="http://schemas.openxmlformats.org/drawingml/2006/main">
+              <a:ext uri="{FF2B5EF4-FFF2-40B4-BE49-F238E27FC236}">
+                <a16:creationId xmlns:a16="http://schemas.microsoft.com/office/drawing/2014/main" id="{9E879315-A04B-46CF-A1B8-AD85CA5A46E5}"/>
+              </a:ext>
+            </a:extLst>
+          </p:cNvPr>
+          <p:cNvSpPr>
+            <a:spLocks xmlns:a="http://schemas.openxmlformats.org/drawingml/2006/main" noGrp="1"/>
+          </p:cNvSpPr>
+          <p:nvPr/>
+        </p:nvSpPr>
+        <p:spPr>
+          <a:xfrm xmlns:a="http://schemas.openxmlformats.org/drawingml/2006/main">
+            <a:off x="4317111" y="3822668"/>
+            <a:ext cx="3156109" cy="1586294"/>
+          </a:xfrm>
+          <a:prstGeom xmlns:a="http://schemas.openxmlformats.org/drawingml/2006/main" prst="rect">
+            <a:avLst/>
+          </a:prstGeom>
+        </p:spPr>
+        <p:txBody>
+          <a:bodyPr xmlns:a="http://schemas.openxmlformats.org/drawingml/2006/main" lIns="0" tIns="0" rIns="0" bIns="0">
+            <a:noAutofit/>
+          </a:bodyPr>
+          <a:lstStyle xmlns:a="http://schemas.openxmlformats.org/drawingml/2006/main"/>
+          <a:p xmlns:a="http://schemas.openxmlformats.org/drawingml/2006/main">
+            <a:pPr algn="l">
+              <a:buNone/>
+              <a:defRPr sz="2400">
+                <a:solidFill>
+                  <a:srgbClr val="000000"/>
+                </a:solidFill>
+                <a:latin typeface="Helvetica Neue"/>
+                <a:ea typeface="Helvetica Neue"/>
+                <a:cs typeface="Helvetica Neue"/>
+              </a:defRPr>
+            </a:pPr>
+            <a:r>
+              <a:t>0.8.0</a:t>
+            </a:r>
+          </a:p>
+          <a:p xmlns:a="http://schemas.openxmlformats.org/drawingml/2006/main">
+            <a:pPr algn="l">
+              <a:buNone/>
+              <a:defRPr sz="2400">
+                <a:solidFill>
+                  <a:srgbClr val="000000"/>
+                </a:solidFill>
+                <a:latin typeface="Helvetica Neue"/>
+                <a:ea typeface="Helvetica Neue"/>
+                <a:cs typeface="Helvetica Neue"/>
+              </a:defRPr>
+            </a:pPr>
+            <a:r>
+              <a:t>Gateway만 교체
+</a:t>
+            </a:r>
+            <a:r>
+              <a:t>Assist Flow 계약 유지</a:t>
+            </a:r>
+          </a:p>
+        </p:txBody>
+      </p:sp>
+      <p:sp>
+        <p:nvSpPr>
+          <p:cNvPr id="11" name="Text-Placeholder-16-12">
+            <a:extLst xmlns:a="http://schemas.openxmlformats.org/drawingml/2006/main">
+              <a:ext uri="{FF2B5EF4-FFF2-40B4-BE49-F238E27FC236}">
+                <a16:creationId xmlns:a16="http://schemas.microsoft.com/office/drawing/2014/main" id="{667A8A4A-95FE-4FE5-9351-4C3E4EB6B568}"/>
+              </a:ext>
+            </a:extLst>
+          </p:cNvPr>
+          <p:cNvSpPr>
+            <a:spLocks xmlns:a="http://schemas.openxmlformats.org/drawingml/2006/main" noGrp="1"/>
+          </p:cNvSpPr>
+          <p:nvPr/>
+        </p:nvSpPr>
+        <p:spPr>
+          <a:xfrm xmlns:a="http://schemas.openxmlformats.org/drawingml/2006/main">
+            <a:off x="399859" y="3822668"/>
+            <a:ext cx="3156109" cy="1586294"/>
+          </a:xfrm>
+          <a:prstGeom xmlns:a="http://schemas.openxmlformats.org/drawingml/2006/main" prst="rect">
+            <a:avLst/>
+          </a:prstGeom>
+        </p:spPr>
+        <p:txBody>
+          <a:bodyPr xmlns:a="http://schemas.openxmlformats.org/drawingml/2006/main" lIns="0" tIns="0" rIns="0" bIns="0">
+            <a:noAutofit/>
+          </a:bodyPr>
+          <a:lstStyle xmlns:a="http://schemas.openxmlformats.org/drawingml/2006/main"/>
+          <a:p xmlns:a="http://schemas.openxmlformats.org/drawingml/2006/main">
+            <a:pPr algn="l">
+              <a:buNone/>
+              <a:defRPr sz="2400">
+                <a:solidFill>
+                  <a:srgbClr val="000000"/>
+                </a:solidFill>
+                <a:latin typeface="Helvetica Neue"/>
+                <a:ea typeface="Helvetica Neue"/>
+                <a:cs typeface="Helvetica Neue"/>
+              </a:defRPr>
+            </a:pPr>
+            <a:r>
+              <a:t>Backup</a:t>
+            </a:r>
+          </a:p>
+          <a:p xmlns:a="http://schemas.openxmlformats.org/drawingml/2006/main">
+            <a:pPr algn="l">
+              <a:buNone/>
+              <a:defRPr sz="2400">
+                <a:solidFill>
+                  <a:srgbClr val="000000"/>
+                </a:solidFill>
+                <a:latin typeface="Helvetica Neue"/>
+                <a:ea typeface="Helvetica Neue"/>
+                <a:cs typeface="Helvetica Neue"/>
+              </a:defRPr>
+            </a:pPr>
+            <a:r>
+              <a:t>DB·소스·Image ID
+보호 가드 PASS</a:t>
+            </a:r>
+          </a:p>
+        </p:txBody>
+      </p:sp>
+      <p:sp>
+        <p:nvSpPr>
+          <p:cNvPr id="12" name="Text-Placeholder-16-13">
+            <a:extLst xmlns:a="http://schemas.openxmlformats.org/drawingml/2006/main">
+              <a:ext uri="{FF2B5EF4-FFF2-40B4-BE49-F238E27FC236}">
+                <a16:creationId xmlns:a16="http://schemas.microsoft.com/office/drawing/2014/main" id="{FFE62EA7-8975-4423-9CF4-557C984FCCE3}"/>
+              </a:ext>
+            </a:extLst>
+          </p:cNvPr>
+          <p:cNvSpPr>
+            <a:spLocks xmlns:a="http://schemas.openxmlformats.org/drawingml/2006/main" noGrp="1"/>
+          </p:cNvSpPr>
+          <p:nvPr/>
+        </p:nvSpPr>
+        <p:spPr>
+          <a:xfrm xmlns:a="http://schemas.openxmlformats.org/drawingml/2006/main">
+            <a:off x="8177879" y="3822668"/>
+            <a:ext cx="3156109" cy="1586294"/>
+          </a:xfrm>
+          <a:prstGeom xmlns:a="http://schemas.openxmlformats.org/drawingml/2006/main" prst="rect">
+            <a:avLst/>
+          </a:prstGeom>
+        </p:spPr>
+        <p:txBody>
+          <a:bodyPr xmlns:a="http://schemas.openxmlformats.org/drawingml/2006/main" lIns="0" tIns="0" rIns="0" bIns="0">
+            <a:noAutofit/>
+          </a:bodyPr>
+          <a:lstStyle xmlns:a="http://schemas.openxmlformats.org/drawingml/2006/main"/>
+          <a:p xmlns:a="http://schemas.openxmlformats.org/drawingml/2006/main">
+            <a:pPr algn="l">
+              <a:buNone/>
+              <a:defRPr sz="2400">
+                <a:solidFill>
+                  <a:srgbClr val="000000"/>
+                </a:solidFill>
+                <a:latin typeface="Helvetica Neue"/>
+                <a:ea typeface="Helvetica Neue"/>
+                <a:cs typeface="Helvetica Neue"/>
+              </a:defRPr>
+            </a:pPr>
+            <a:r>
+              <a:t>Verify</a:t>
+            </a:r>
+          </a:p>
+          <a:p xmlns:a="http://schemas.openxmlformats.org/drawingml/2006/main">
+            <a:pPr algn="l">
+              <a:buNone/>
+              <a:defRPr sz="2400">
+                <a:solidFill>
+                  <a:srgbClr val="000000"/>
+                </a:solidFill>
+                <a:latin typeface="Helvetica Neue"/>
+                <a:ea typeface="Helvetica Neue"/>
+                <a:cs typeface="Helvetica Neue"/>
+              </a:defRPr>
+            </a:pPr>
+            <a:r>
+              <a:t>Health healthy</a:t>
+            </a:r>
+            <a:r>
+              <a:t>
+Chat 동결 가드 PASS</a:t>
+            </a:r>
+          </a:p>
+        </p:txBody>
+      </p:sp>
+    </p:spTree>
+    <p:extLst>
+      <p:ext uri="{BB962C8B-B14F-4D97-AF65-F5344CB8AC3E}">
+        <p14:creationId xmlns:p14="http://schemas.microsoft.com/office/powerpoint/2010/main" val="1953526460"/>
+      </p:ext>
+    </p:extLst>
+  </p:cSld>
+</p:sld>
+</file>
+
+<file path=ppt/slides/slide9.xml><?xml version="1.0" encoding="utf-8"?>
+<p:sld xmlns:p="http://schemas.openxmlformats.org/presentationml/2006/main">
+  <p:cSld>
+    <p:spTree>
+      <p:nvGrpSpPr>
+        <p:cNvPr id="1" name=""/>
+        <p:cNvGrpSpPr/>
+        <p:nvPr/>
+      </p:nvGrpSpPr>
+      <p:grpSpPr>
+        <a:xfrm xmlns:a="http://schemas.openxmlformats.org/drawingml/2006/main"/>
+      </p:grpSpPr>
+      <p:sp>
+        <p:nvSpPr>
           <p:cNvPr id="4" name="Title-3-1">
             <a:extLst xmlns:a="http://schemas.openxmlformats.org/drawingml/2006/main">
               <a:ext uri="{FF2B5EF4-FFF2-40B4-BE49-F238E27FC236}">
@@ -4655,6 +5123,7 @@
           <a:lstStyle xmlns:a="http://schemas.openxmlformats.org/drawingml/2006/main"/>
           <a:p xmlns:a="http://schemas.openxmlformats.org/drawingml/2006/main">
             <a:pPr algn="l">
+              <a:buNone/>
               <a:defRPr sz="6000">
                 <a:solidFill>
                   <a:srgbClr val="000000"/>
@@ -4665,7 +5134,7 @@
               </a:defRPr>
             </a:pPr>
             <a:r>
-              <a:t>질문 + 화면 + 소스
+              <a:t>질문 + 화면 + 로그 + 소스
 → 근거 있는 한 보고서</a:t>
             </a:r>
           </a:p>
@@ -4701,6 +5170,7 @@
           <a:lstStyle xmlns:a="http://schemas.openxmlformats.org/drawingml/2006/main"/>
           <a:p xmlns:a="http://schemas.openxmlformats.org/drawingml/2006/main">
             <a:pPr algn="l">
+              <a:buNone/>
               <a:defRPr sz="2400">
                 <a:solidFill>
                   <a:srgbClr val="000000"/>
@@ -4746,6 +5216,7 @@
           <a:lstStyle xmlns:a="http://schemas.openxmlformats.org/drawingml/2006/main"/>
           <a:p xmlns:a="http://schemas.openxmlformats.org/drawingml/2006/main">
             <a:pPr algn="l">
+              <a:buNone/>
               <a:defRPr sz="2400">
                 <a:solidFill>
                   <a:srgbClr val="000000"/>
